--- a/Bilder/Optisches Pumpen/Aufbau.pptx
+++ b/Bilder/Optisches Pumpen/Aufbau.pptx
@@ -104,13 +104,18 @@
       </a:defRPr>
     </a:lvl9pPr>
   </p:defaultTextStyle>
+  <p:extLst>
+    <p:ext uri="{EFAFB233-063F-42B5-8137-9DF3F51BA10A}">
+      <p15:sldGuideLst xmlns:p15="http://schemas.microsoft.com/office/powerpoint/2012/main"/>
+    </p:ext>
+  </p:extLst>
 </p:presentation>
 </file>
 
 <file path=ppt/revisionInfo.xml><?xml version="1.0" encoding="utf-8"?>
 <p1510:revInfo xmlns:a="http://schemas.openxmlformats.org/drawingml/2006/main" xmlns:r="http://schemas.openxmlformats.org/officeDocument/2006/relationships" xmlns:p1510="http://schemas.microsoft.com/office/powerpoint/2015/10/main">
   <p1510:revLst>
-    <p1510:client id="{F5E06F60-0186-47B6-B46D-446481CEC3EE}" v="9" dt="2026-06-08T12:34:04.706"/>
+    <p1510:client id="{F5E06F60-0186-47B6-B46D-446481CEC3EE}" v="20" dt="2026-06-10T11:47:06.944"/>
   </p1510:revLst>
 </p1510:revInfo>
 </file>
@@ -120,12 +125,12 @@
   <pc:docChgLst>
     <pc:chgData name="Nicolas Rohrbeck" userId="97cf50ec-6fdd-4c3f-be9c-69633257c89c" providerId="ADAL" clId="{1E685613-085C-417C-ADF2-610F19D55445}"/>
     <pc:docChg chg="undo custSel modSld modMainMaster">
-      <pc:chgData name="Nicolas Rohrbeck" userId="97cf50ec-6fdd-4c3f-be9c-69633257c89c" providerId="ADAL" clId="{1E685613-085C-417C-ADF2-610F19D55445}" dt="2026-06-08T12:35:38.841" v="51" actId="1036"/>
+      <pc:chgData name="Nicolas Rohrbeck" userId="97cf50ec-6fdd-4c3f-be9c-69633257c89c" providerId="ADAL" clId="{1E685613-085C-417C-ADF2-610F19D55445}" dt="2026-06-10T11:48:01.132" v="324" actId="1076"/>
       <pc:docMkLst>
         <pc:docMk/>
       </pc:docMkLst>
       <pc:sldChg chg="addSp delSp modSp mod">
-        <pc:chgData name="Nicolas Rohrbeck" userId="97cf50ec-6fdd-4c3f-be9c-69633257c89c" providerId="ADAL" clId="{1E685613-085C-417C-ADF2-610F19D55445}" dt="2026-06-08T12:35:38.841" v="51" actId="1036"/>
+        <pc:chgData name="Nicolas Rohrbeck" userId="97cf50ec-6fdd-4c3f-be9c-69633257c89c" providerId="ADAL" clId="{1E685613-085C-417C-ADF2-610F19D55445}" dt="2026-06-10T11:48:01.132" v="324" actId="1076"/>
         <pc:sldMkLst>
           <pc:docMk/>
           <pc:sldMk cId="3631881611" sldId="256"/>
@@ -168,6 +173,14 @@
             <pc:docMk/>
             <pc:sldMk cId="3631881611" sldId="256"/>
             <ac:spMk id="15" creationId="{59A23558-66C1-68BB-F90A-AF5B0CB01EAA}"/>
+          </ac:spMkLst>
+        </pc:spChg>
+        <pc:spChg chg="add del">
+          <ac:chgData name="Nicolas Rohrbeck" userId="97cf50ec-6fdd-4c3f-be9c-69633257c89c" providerId="ADAL" clId="{1E685613-085C-417C-ADF2-610F19D55445}" dt="2026-06-10T11:37:16.697" v="88" actId="478"/>
+          <ac:spMkLst>
+            <pc:docMk/>
+            <pc:sldMk cId="3631881611" sldId="256"/>
+            <ac:spMk id="19" creationId="{72C0E9A5-6729-55F2-087E-29A8C1DCB7A3}"/>
           </ac:spMkLst>
         </pc:spChg>
         <pc:spChg chg="mod">
@@ -218,38 +231,78 @@
             <ac:spMk id="38" creationId="{D097AA04-7DB4-20D6-CBF4-A85592782801}"/>
           </ac:spMkLst>
         </pc:spChg>
+        <pc:spChg chg="add mod">
+          <ac:chgData name="Nicolas Rohrbeck" userId="97cf50ec-6fdd-4c3f-be9c-69633257c89c" providerId="ADAL" clId="{1E685613-085C-417C-ADF2-610F19D55445}" dt="2026-06-10T11:42:40.315" v="142" actId="20577"/>
+          <ac:spMkLst>
+            <pc:docMk/>
+            <pc:sldMk cId="3631881611" sldId="256"/>
+            <ac:spMk id="45" creationId="{55886289-CCD6-FA46-402B-A943AFDE208F}"/>
+          </ac:spMkLst>
+        </pc:spChg>
+        <pc:spChg chg="add mod">
+          <ac:chgData name="Nicolas Rohrbeck" userId="97cf50ec-6fdd-4c3f-be9c-69633257c89c" providerId="ADAL" clId="{1E685613-085C-417C-ADF2-610F19D55445}" dt="2026-06-10T11:42:31.176" v="140" actId="1076"/>
+          <ac:spMkLst>
+            <pc:docMk/>
+            <pc:sldMk cId="3631881611" sldId="256"/>
+            <ac:spMk id="51" creationId="{E5C7C253-934E-86C8-088E-C5DEC114EA98}"/>
+          </ac:spMkLst>
+        </pc:spChg>
+        <pc:spChg chg="add mod ord">
+          <ac:chgData name="Nicolas Rohrbeck" userId="97cf50ec-6fdd-4c3f-be9c-69633257c89c" providerId="ADAL" clId="{1E685613-085C-417C-ADF2-610F19D55445}" dt="2026-06-10T11:47:24.581" v="202" actId="170"/>
+          <ac:spMkLst>
+            <pc:docMk/>
+            <pc:sldMk cId="3631881611" sldId="256"/>
+            <ac:spMk id="52" creationId="{65FE92F4-14C3-3F52-447F-00F7FC710145}"/>
+          </ac:spMkLst>
+        </pc:spChg>
         <pc:spChg chg="mod">
-          <ac:chgData name="Nicolas Rohrbeck" userId="97cf50ec-6fdd-4c3f-be9c-69633257c89c" providerId="ADAL" clId="{1E685613-085C-417C-ADF2-610F19D55445}" dt="2026-06-08T12:32:26.880" v="15" actId="20577"/>
+          <ac:chgData name="Nicolas Rohrbeck" userId="97cf50ec-6fdd-4c3f-be9c-69633257c89c" providerId="ADAL" clId="{1E685613-085C-417C-ADF2-610F19D55445}" dt="2026-06-10T11:47:48.147" v="322" actId="6549"/>
+          <ac:spMkLst>
+            <pc:docMk/>
+            <pc:sldMk cId="3631881611" sldId="256"/>
+            <ac:spMk id="55" creationId="{D8BF7E61-80E9-8FD0-A7B2-DB9B4551AF70}"/>
+          </ac:spMkLst>
+        </pc:spChg>
+        <pc:spChg chg="del mod ord">
+          <ac:chgData name="Nicolas Rohrbeck" userId="97cf50ec-6fdd-4c3f-be9c-69633257c89c" providerId="ADAL" clId="{1E685613-085C-417C-ADF2-610F19D55445}" dt="2026-06-10T11:46:15.405" v="178" actId="478"/>
           <ac:spMkLst>
             <pc:docMk/>
             <pc:sldMk cId="3631881611" sldId="256"/>
             <ac:spMk id="62" creationId="{C65333D7-4191-D113-43F6-9E55E279F162}"/>
           </ac:spMkLst>
         </pc:spChg>
-        <pc:spChg chg="mod">
-          <ac:chgData name="Nicolas Rohrbeck" userId="97cf50ec-6fdd-4c3f-be9c-69633257c89c" providerId="ADAL" clId="{1E685613-085C-417C-ADF2-610F19D55445}" dt="2026-06-08T12:35:08.765" v="39" actId="1076"/>
+        <pc:spChg chg="mod ord">
+          <ac:chgData name="Nicolas Rohrbeck" userId="97cf50ec-6fdd-4c3f-be9c-69633257c89c" providerId="ADAL" clId="{1E685613-085C-417C-ADF2-610F19D55445}" dt="2026-06-10T11:36:56.975" v="86" actId="166"/>
           <ac:spMkLst>
             <pc:docMk/>
             <pc:sldMk cId="3631881611" sldId="256"/>
             <ac:spMk id="1034" creationId="{4AB8D5BC-E9FB-9624-A74B-8815CCABF3F8}"/>
           </ac:spMkLst>
         </pc:spChg>
-        <pc:spChg chg="add del mod">
-          <ac:chgData name="Nicolas Rohrbeck" userId="97cf50ec-6fdd-4c3f-be9c-69633257c89c" providerId="ADAL" clId="{1E685613-085C-417C-ADF2-610F19D55445}" dt="2026-06-08T12:32:34.861" v="16" actId="478"/>
-          <ac:spMkLst>
-            <pc:docMk/>
-            <pc:sldMk cId="3631881611" sldId="256"/>
-            <ac:spMk id="1035" creationId="{A1F83649-3290-F5CD-5B64-B91ED8243AE4}"/>
-          </ac:spMkLst>
-        </pc:spChg>
         <pc:spChg chg="mod">
-          <ac:chgData name="Nicolas Rohrbeck" userId="97cf50ec-6fdd-4c3f-be9c-69633257c89c" providerId="ADAL" clId="{1E685613-085C-417C-ADF2-610F19D55445}" dt="2026-06-08T12:34:04.706" v="20" actId="1076"/>
+          <ac:chgData name="Nicolas Rohrbeck" userId="97cf50ec-6fdd-4c3f-be9c-69633257c89c" providerId="ADAL" clId="{1E685613-085C-417C-ADF2-610F19D55445}" dt="2026-06-10T11:34:20.983" v="60" actId="164"/>
           <ac:spMkLst>
             <pc:docMk/>
             <pc:sldMk cId="3631881611" sldId="256"/>
             <ac:spMk id="1044" creationId="{3CC806F6-4699-36DF-60AA-EF3FFCFBDB52}"/>
           </ac:spMkLst>
         </pc:spChg>
+        <pc:grpChg chg="add mod ord">
+          <ac:chgData name="Nicolas Rohrbeck" userId="97cf50ec-6fdd-4c3f-be9c-69633257c89c" providerId="ADAL" clId="{1E685613-085C-417C-ADF2-610F19D55445}" dt="2026-06-10T11:45:05.336" v="165" actId="166"/>
+          <ac:grpSpMkLst>
+            <pc:docMk/>
+            <pc:sldMk cId="3631881611" sldId="256"/>
+            <ac:grpSpMk id="4" creationId="{A1404B32-4A7D-C083-7F52-E1F0FE36A7CC}"/>
+          </ac:grpSpMkLst>
+        </pc:grpChg>
+        <pc:grpChg chg="add mod">
+          <ac:chgData name="Nicolas Rohrbeck" userId="97cf50ec-6fdd-4c3f-be9c-69633257c89c" providerId="ADAL" clId="{1E685613-085C-417C-ADF2-610F19D55445}" dt="2026-06-10T11:46:35.253" v="185" actId="1076"/>
+          <ac:grpSpMkLst>
+            <pc:docMk/>
+            <pc:sldMk cId="3631881611" sldId="256"/>
+            <ac:grpSpMk id="54" creationId="{0D4D6312-FB04-3188-8E57-0E54C8CFD4F7}"/>
+          </ac:grpSpMkLst>
+        </pc:grpChg>
         <pc:picChg chg="mod">
           <ac:chgData name="Nicolas Rohrbeck" userId="97cf50ec-6fdd-4c3f-be9c-69633257c89c" providerId="ADAL" clId="{1E685613-085C-417C-ADF2-610F19D55445}" dt="2026-06-08T12:33:45.998" v="18" actId="1076"/>
           <ac:picMkLst>
@@ -258,16 +311,184 @@
             <ac:picMk id="5" creationId="{60C0DAAB-2EF4-98CC-08E2-A1B417234463}"/>
           </ac:picMkLst>
         </pc:picChg>
-        <pc:picChg chg="mod">
-          <ac:chgData name="Nicolas Rohrbeck" userId="97cf50ec-6fdd-4c3f-be9c-69633257c89c" providerId="ADAL" clId="{1E685613-085C-417C-ADF2-610F19D55445}" dt="2026-06-08T12:34:04.706" v="20" actId="1076"/>
+        <pc:picChg chg="del mod">
+          <ac:chgData name="Nicolas Rohrbeck" userId="97cf50ec-6fdd-4c3f-be9c-69633257c89c" providerId="ADAL" clId="{1E685613-085C-417C-ADF2-610F19D55445}" dt="2026-06-10T11:40:58.764" v="126" actId="478"/>
           <ac:picMkLst>
             <pc:docMk/>
             <pc:sldMk cId="3631881611" sldId="256"/>
             <ac:picMk id="1028" creationId="{D2A6BE49-3976-D018-7DCF-D44CFBB9CB84}"/>
           </ac:picMkLst>
         </pc:picChg>
+        <pc:cxnChg chg="add mod">
+          <ac:chgData name="Nicolas Rohrbeck" userId="97cf50ec-6fdd-4c3f-be9c-69633257c89c" providerId="ADAL" clId="{1E685613-085C-417C-ADF2-610F19D55445}" dt="2026-06-10T11:43:04.959" v="143" actId="1582"/>
+          <ac:cxnSpMkLst>
+            <pc:docMk/>
+            <pc:sldMk cId="3631881611" sldId="256"/>
+            <ac:cxnSpMk id="12" creationId="{D9053A82-7678-CFB8-DD7B-7D4138B67B38}"/>
+          </ac:cxnSpMkLst>
+        </pc:cxnChg>
+        <pc:cxnChg chg="add mod ord">
+          <ac:chgData name="Nicolas Rohrbeck" userId="97cf50ec-6fdd-4c3f-be9c-69633257c89c" providerId="ADAL" clId="{1E685613-085C-417C-ADF2-610F19D55445}" dt="2026-06-10T11:45:05.336" v="165" actId="166"/>
+          <ac:cxnSpMkLst>
+            <pc:docMk/>
+            <pc:sldMk cId="3631881611" sldId="256"/>
+            <ac:cxnSpMk id="16" creationId="{C758EB92-6159-8016-730F-1DEF0487CEFE}"/>
+          </ac:cxnSpMkLst>
+        </pc:cxnChg>
+        <pc:cxnChg chg="add mod ord">
+          <ac:chgData name="Nicolas Rohrbeck" userId="97cf50ec-6fdd-4c3f-be9c-69633257c89c" providerId="ADAL" clId="{1E685613-085C-417C-ADF2-610F19D55445}" dt="2026-06-10T11:45:05.336" v="165" actId="166"/>
+          <ac:cxnSpMkLst>
+            <pc:docMk/>
+            <pc:sldMk cId="3631881611" sldId="256"/>
+            <ac:cxnSpMk id="21" creationId="{20DAB114-D73D-3075-073F-A21BEBFE7A4A}"/>
+          </ac:cxnSpMkLst>
+        </pc:cxnChg>
+        <pc:cxnChg chg="add mod ord">
+          <ac:chgData name="Nicolas Rohrbeck" userId="97cf50ec-6fdd-4c3f-be9c-69633257c89c" providerId="ADAL" clId="{1E685613-085C-417C-ADF2-610F19D55445}" dt="2026-06-10T11:45:05.336" v="165" actId="166"/>
+          <ac:cxnSpMkLst>
+            <pc:docMk/>
+            <pc:sldMk cId="3631881611" sldId="256"/>
+            <ac:cxnSpMk id="23" creationId="{E87EC00E-D7AA-31C7-7C24-9DEC496E1165}"/>
+          </ac:cxnSpMkLst>
+        </pc:cxnChg>
+        <pc:cxnChg chg="add mod">
+          <ac:chgData name="Nicolas Rohrbeck" userId="97cf50ec-6fdd-4c3f-be9c-69633257c89c" providerId="ADAL" clId="{1E685613-085C-417C-ADF2-610F19D55445}" dt="2026-06-10T11:43:32.360" v="149" actId="1582"/>
+          <ac:cxnSpMkLst>
+            <pc:docMk/>
+            <pc:sldMk cId="3631881611" sldId="256"/>
+            <ac:cxnSpMk id="30" creationId="{4AFAC6D2-4AE8-3109-EB75-09331293D8EE}"/>
+          </ac:cxnSpMkLst>
+        </pc:cxnChg>
+        <pc:cxnChg chg="add mod">
+          <ac:chgData name="Nicolas Rohrbeck" userId="97cf50ec-6fdd-4c3f-be9c-69633257c89c" providerId="ADAL" clId="{1E685613-085C-417C-ADF2-610F19D55445}" dt="2026-06-10T11:43:35.758" v="152" actId="1036"/>
+          <ac:cxnSpMkLst>
+            <pc:docMk/>
+            <pc:sldMk cId="3631881611" sldId="256"/>
+            <ac:cxnSpMk id="34" creationId="{754A1DFE-238E-79AD-57CE-BBFC9E9669A1}"/>
+          </ac:cxnSpMkLst>
+        </pc:cxnChg>
+        <pc:cxnChg chg="add mod">
+          <ac:chgData name="Nicolas Rohrbeck" userId="97cf50ec-6fdd-4c3f-be9c-69633257c89c" providerId="ADAL" clId="{1E685613-085C-417C-ADF2-610F19D55445}" dt="2026-06-10T11:48:01.132" v="324" actId="1076"/>
+          <ac:cxnSpMkLst>
+            <pc:docMk/>
+            <pc:sldMk cId="3631881611" sldId="256"/>
+            <ac:cxnSpMk id="36" creationId="{325DA83B-2EEE-50A9-8C6C-65083677B224}"/>
+          </ac:cxnSpMkLst>
+        </pc:cxnChg>
         <pc:cxnChg chg="mod">
-          <ac:chgData name="Nicolas Rohrbeck" userId="97cf50ec-6fdd-4c3f-be9c-69633257c89c" providerId="ADAL" clId="{1E685613-085C-417C-ADF2-610F19D55445}" dt="2026-06-08T12:35:38.841" v="51" actId="1036"/>
+          <ac:chgData name="Nicolas Rohrbeck" userId="97cf50ec-6fdd-4c3f-be9c-69633257c89c" providerId="ADAL" clId="{1E685613-085C-417C-ADF2-610F19D55445}" dt="2026-06-10T11:46:23.474" v="184"/>
+          <ac:cxnSpMkLst>
+            <pc:docMk/>
+            <pc:sldMk cId="3631881611" sldId="256"/>
+            <ac:cxnSpMk id="56" creationId="{185AE464-3B00-48AA-7DAA-BB8485EBB68C}"/>
+          </ac:cxnSpMkLst>
+        </pc:cxnChg>
+        <pc:cxnChg chg="mod">
+          <ac:chgData name="Nicolas Rohrbeck" userId="97cf50ec-6fdd-4c3f-be9c-69633257c89c" providerId="ADAL" clId="{1E685613-085C-417C-ADF2-610F19D55445}" dt="2026-06-10T11:46:23.474" v="184"/>
+          <ac:cxnSpMkLst>
+            <pc:docMk/>
+            <pc:sldMk cId="3631881611" sldId="256"/>
+            <ac:cxnSpMk id="57" creationId="{E7EBB3E9-2CB7-F04F-F4B3-1BF9AA42FA58}"/>
+          </ac:cxnSpMkLst>
+        </pc:cxnChg>
+        <pc:cxnChg chg="mod">
+          <ac:chgData name="Nicolas Rohrbeck" userId="97cf50ec-6fdd-4c3f-be9c-69633257c89c" providerId="ADAL" clId="{1E685613-085C-417C-ADF2-610F19D55445}" dt="2026-06-10T11:46:23.474" v="184"/>
+          <ac:cxnSpMkLst>
+            <pc:docMk/>
+            <pc:sldMk cId="3631881611" sldId="256"/>
+            <ac:cxnSpMk id="58" creationId="{F47011C6-F11E-5BC6-0379-0923050844C4}"/>
+          </ac:cxnSpMkLst>
+        </pc:cxnChg>
+        <pc:cxnChg chg="mod">
+          <ac:chgData name="Nicolas Rohrbeck" userId="97cf50ec-6fdd-4c3f-be9c-69633257c89c" providerId="ADAL" clId="{1E685613-085C-417C-ADF2-610F19D55445}" dt="2026-06-10T11:46:23.474" v="184"/>
+          <ac:cxnSpMkLst>
+            <pc:docMk/>
+            <pc:sldMk cId="3631881611" sldId="256"/>
+            <ac:cxnSpMk id="59" creationId="{3A2D5D01-08AA-078D-7754-634CDB324F0A}"/>
+          </ac:cxnSpMkLst>
+        </pc:cxnChg>
+        <pc:cxnChg chg="del ord">
+          <ac:chgData name="Nicolas Rohrbeck" userId="97cf50ec-6fdd-4c3f-be9c-69633257c89c" providerId="ADAL" clId="{1E685613-085C-417C-ADF2-610F19D55445}" dt="2026-06-10T11:46:16.787" v="180" actId="478"/>
+          <ac:cxnSpMkLst>
+            <pc:docMk/>
+            <pc:sldMk cId="3631881611" sldId="256"/>
+            <ac:cxnSpMk id="63" creationId="{DF982F10-5253-318A-9A3B-7444938F2C29}"/>
+          </ac:cxnSpMkLst>
+        </pc:cxnChg>
+        <pc:cxnChg chg="add mod">
+          <ac:chgData name="Nicolas Rohrbeck" userId="97cf50ec-6fdd-4c3f-be9c-69633257c89c" providerId="ADAL" clId="{1E685613-085C-417C-ADF2-610F19D55445}" dt="2026-06-10T11:46:49.824" v="189" actId="14100"/>
+          <ac:cxnSpMkLst>
+            <pc:docMk/>
+            <pc:sldMk cId="3631881611" sldId="256"/>
+            <ac:cxnSpMk id="64" creationId="{C00C91DB-4D77-BABD-C4EF-0DC5DD3EDE6F}"/>
+          </ac:cxnSpMkLst>
+        </pc:cxnChg>
+        <pc:cxnChg chg="mod ord">
+          <ac:chgData name="Nicolas Rohrbeck" userId="97cf50ec-6fdd-4c3f-be9c-69633257c89c" providerId="ADAL" clId="{1E685613-085C-417C-ADF2-610F19D55445}" dt="2026-06-10T11:47:03.127" v="196" actId="1038"/>
+          <ac:cxnSpMkLst>
+            <pc:docMk/>
+            <pc:sldMk cId="3631881611" sldId="256"/>
+            <ac:cxnSpMk id="67" creationId="{56F9D3F1-763C-BC12-46D8-33A611A6BF18}"/>
+          </ac:cxnSpMkLst>
+        </pc:cxnChg>
+        <pc:cxnChg chg="add mod">
+          <ac:chgData name="Nicolas Rohrbeck" userId="97cf50ec-6fdd-4c3f-be9c-69633257c89c" providerId="ADAL" clId="{1E685613-085C-417C-ADF2-610F19D55445}" dt="2026-06-10T11:47:18.086" v="201" actId="1035"/>
+          <ac:cxnSpMkLst>
+            <pc:docMk/>
+            <pc:sldMk cId="3631881611" sldId="256"/>
+            <ac:cxnSpMk id="69" creationId="{04C1664A-0ED5-F7E9-0A2D-D51FF7AB687E}"/>
+          </ac:cxnSpMkLst>
+        </pc:cxnChg>
+        <pc:cxnChg chg="del ord">
+          <ac:chgData name="Nicolas Rohrbeck" userId="97cf50ec-6fdd-4c3f-be9c-69633257c89c" providerId="ADAL" clId="{1E685613-085C-417C-ADF2-610F19D55445}" dt="2026-06-10T11:46:16.055" v="179" actId="478"/>
+          <ac:cxnSpMkLst>
+            <pc:docMk/>
+            <pc:sldMk cId="3631881611" sldId="256"/>
+            <ac:cxnSpMk id="72" creationId="{934CF841-0DA4-5679-294B-310608964CE2}"/>
+          </ac:cxnSpMkLst>
+        </pc:cxnChg>
+        <pc:cxnChg chg="del ord">
+          <ac:chgData name="Nicolas Rohrbeck" userId="97cf50ec-6fdd-4c3f-be9c-69633257c89c" providerId="ADAL" clId="{1E685613-085C-417C-ADF2-610F19D55445}" dt="2026-06-10T11:46:17.839" v="181" actId="478"/>
+          <ac:cxnSpMkLst>
+            <pc:docMk/>
+            <pc:sldMk cId="3631881611" sldId="256"/>
+            <ac:cxnSpMk id="73" creationId="{F4371F28-1504-9BD3-1D74-1015CE7010DE}"/>
+          </ac:cxnSpMkLst>
+        </pc:cxnChg>
+        <pc:cxnChg chg="del">
+          <ac:chgData name="Nicolas Rohrbeck" userId="97cf50ec-6fdd-4c3f-be9c-69633257c89c" providerId="ADAL" clId="{1E685613-085C-417C-ADF2-610F19D55445}" dt="2026-06-10T11:46:19.289" v="183" actId="478"/>
+          <ac:cxnSpMkLst>
+            <pc:docMk/>
+            <pc:sldMk cId="3631881611" sldId="256"/>
+            <ac:cxnSpMk id="74" creationId="{AFBE105A-6772-02FE-EAA8-9F65DD0C1AB2}"/>
+          </ac:cxnSpMkLst>
+        </pc:cxnChg>
+        <pc:cxnChg chg="del">
+          <ac:chgData name="Nicolas Rohrbeck" userId="97cf50ec-6fdd-4c3f-be9c-69633257c89c" providerId="ADAL" clId="{1E685613-085C-417C-ADF2-610F19D55445}" dt="2026-06-10T11:46:18.411" v="182" actId="478"/>
+          <ac:cxnSpMkLst>
+            <pc:docMk/>
+            <pc:sldMk cId="3631881611" sldId="256"/>
+            <ac:cxnSpMk id="76" creationId="{8D4C6542-4F3A-6BEB-EC9F-BF9144D80A07}"/>
+          </ac:cxnSpMkLst>
+        </pc:cxnChg>
+        <pc:cxnChg chg="mod">
+          <ac:chgData name="Nicolas Rohrbeck" userId="97cf50ec-6fdd-4c3f-be9c-69633257c89c" providerId="ADAL" clId="{1E685613-085C-417C-ADF2-610F19D55445}" dt="2026-06-10T11:43:49.893" v="155" actId="1036"/>
+          <ac:cxnSpMkLst>
+            <pc:docMk/>
+            <pc:sldMk cId="3631881611" sldId="256"/>
+            <ac:cxnSpMk id="110" creationId="{C420DEE3-FECA-AC36-0D1D-62C9C8BA193C}"/>
+          </ac:cxnSpMkLst>
+        </pc:cxnChg>
+        <pc:cxnChg chg="mod">
+          <ac:chgData name="Nicolas Rohrbeck" userId="97cf50ec-6fdd-4c3f-be9c-69633257c89c" providerId="ADAL" clId="{1E685613-085C-417C-ADF2-610F19D55445}" dt="2026-06-10T11:43:54.631" v="158" actId="1036"/>
+          <ac:cxnSpMkLst>
+            <pc:docMk/>
+            <pc:sldMk cId="3631881611" sldId="256"/>
+            <ac:cxnSpMk id="112" creationId="{B0EF43DF-571E-8430-2414-F2F48756B6A3}"/>
+          </ac:cxnSpMkLst>
+        </pc:cxnChg>
+        <pc:cxnChg chg="del mod">
+          <ac:chgData name="Nicolas Rohrbeck" userId="97cf50ec-6fdd-4c3f-be9c-69633257c89c" providerId="ADAL" clId="{1E685613-085C-417C-ADF2-610F19D55445}" dt="2026-06-10T11:34:09.125" v="55" actId="478"/>
           <ac:cxnSpMkLst>
             <pc:docMk/>
             <pc:sldMk cId="3631881611" sldId="256"/>
@@ -275,7 +496,7 @@
           </ac:cxnSpMkLst>
         </pc:cxnChg>
         <pc:cxnChg chg="mod">
-          <ac:chgData name="Nicolas Rohrbeck" userId="97cf50ec-6fdd-4c3f-be9c-69633257c89c" providerId="ADAL" clId="{1E685613-085C-417C-ADF2-610F19D55445}" dt="2026-06-08T12:34:26.430" v="25" actId="14100"/>
+          <ac:chgData name="Nicolas Rohrbeck" userId="97cf50ec-6fdd-4c3f-be9c-69633257c89c" providerId="ADAL" clId="{1E685613-085C-417C-ADF2-610F19D55445}" dt="2026-06-10T11:43:04.959" v="143" actId="1582"/>
           <ac:cxnSpMkLst>
             <pc:docMk/>
             <pc:sldMk cId="3631881611" sldId="256"/>
@@ -283,7 +504,7 @@
           </ac:cxnSpMkLst>
         </pc:cxnChg>
         <pc:cxnChg chg="mod">
-          <ac:chgData name="Nicolas Rohrbeck" userId="97cf50ec-6fdd-4c3f-be9c-69633257c89c" providerId="ADAL" clId="{1E685613-085C-417C-ADF2-610F19D55445}" dt="2026-06-08T12:34:04.706" v="20" actId="1076"/>
+          <ac:chgData name="Nicolas Rohrbeck" userId="97cf50ec-6fdd-4c3f-be9c-69633257c89c" providerId="ADAL" clId="{1E685613-085C-417C-ADF2-610F19D55445}" dt="2026-06-10T11:34:20.983" v="60" actId="164"/>
           <ac:cxnSpMkLst>
             <pc:docMk/>
             <pc:sldMk cId="3631881611" sldId="256"/>
@@ -291,7 +512,7 @@
           </ac:cxnSpMkLst>
         </pc:cxnChg>
         <pc:cxnChg chg="mod">
-          <ac:chgData name="Nicolas Rohrbeck" userId="97cf50ec-6fdd-4c3f-be9c-69633257c89c" providerId="ADAL" clId="{1E685613-085C-417C-ADF2-610F19D55445}" dt="2026-06-08T12:34:04.706" v="20" actId="1076"/>
+          <ac:chgData name="Nicolas Rohrbeck" userId="97cf50ec-6fdd-4c3f-be9c-69633257c89c" providerId="ADAL" clId="{1E685613-085C-417C-ADF2-610F19D55445}" dt="2026-06-10T11:34:20.983" v="60" actId="164"/>
           <ac:cxnSpMkLst>
             <pc:docMk/>
             <pc:sldMk cId="3631881611" sldId="256"/>
@@ -299,7 +520,7 @@
           </ac:cxnSpMkLst>
         </pc:cxnChg>
         <pc:cxnChg chg="mod">
-          <ac:chgData name="Nicolas Rohrbeck" userId="97cf50ec-6fdd-4c3f-be9c-69633257c89c" providerId="ADAL" clId="{1E685613-085C-417C-ADF2-610F19D55445}" dt="2026-06-08T12:34:04.706" v="20" actId="1076"/>
+          <ac:chgData name="Nicolas Rohrbeck" userId="97cf50ec-6fdd-4c3f-be9c-69633257c89c" providerId="ADAL" clId="{1E685613-085C-417C-ADF2-610F19D55445}" dt="2026-06-10T11:34:20.983" v="60" actId="164"/>
           <ac:cxnSpMkLst>
             <pc:docMk/>
             <pc:sldMk cId="3631881611" sldId="256"/>
@@ -307,39 +528,31 @@
           </ac:cxnSpMkLst>
         </pc:cxnChg>
         <pc:cxnChg chg="mod">
-          <ac:chgData name="Nicolas Rohrbeck" userId="97cf50ec-6fdd-4c3f-be9c-69633257c89c" providerId="ADAL" clId="{1E685613-085C-417C-ADF2-610F19D55445}" dt="2026-06-08T12:34:04.706" v="20" actId="1076"/>
+          <ac:chgData name="Nicolas Rohrbeck" userId="97cf50ec-6fdd-4c3f-be9c-69633257c89c" providerId="ADAL" clId="{1E685613-085C-417C-ADF2-610F19D55445}" dt="2026-06-10T11:34:20.983" v="60" actId="164"/>
           <ac:cxnSpMkLst>
             <pc:docMk/>
             <pc:sldMk cId="3631881611" sldId="256"/>
             <ac:cxnSpMk id="1048" creationId="{91090FCB-A846-88D4-0267-399A6874AF78}"/>
           </ac:cxnSpMkLst>
         </pc:cxnChg>
-        <pc:cxnChg chg="mod">
-          <ac:chgData name="Nicolas Rohrbeck" userId="97cf50ec-6fdd-4c3f-be9c-69633257c89c" providerId="ADAL" clId="{1E685613-085C-417C-ADF2-610F19D55445}" dt="2026-06-08T12:34:04.706" v="20" actId="1076"/>
+        <pc:cxnChg chg="del mod">
+          <ac:chgData name="Nicolas Rohrbeck" userId="97cf50ec-6fdd-4c3f-be9c-69633257c89c" providerId="ADAL" clId="{1E685613-085C-417C-ADF2-610F19D55445}" dt="2026-06-10T11:34:13.089" v="58" actId="478"/>
           <ac:cxnSpMkLst>
             <pc:docMk/>
             <pc:sldMk cId="3631881611" sldId="256"/>
             <ac:cxnSpMk id="1061" creationId="{A992E1AF-7822-F30B-D55B-07A321DDCD4D}"/>
           </ac:cxnSpMkLst>
         </pc:cxnChg>
-        <pc:cxnChg chg="add mod">
-          <ac:chgData name="Nicolas Rohrbeck" userId="97cf50ec-6fdd-4c3f-be9c-69633257c89c" providerId="ADAL" clId="{1E685613-085C-417C-ADF2-610F19D55445}" dt="2026-06-08T12:35:18.385" v="41" actId="14100"/>
+        <pc:cxnChg chg="add del mod">
+          <ac:chgData name="Nicolas Rohrbeck" userId="97cf50ec-6fdd-4c3f-be9c-69633257c89c" providerId="ADAL" clId="{1E685613-085C-417C-ADF2-610F19D55445}" dt="2026-06-10T11:34:11.454" v="57" actId="478"/>
           <ac:cxnSpMkLst>
             <pc:docMk/>
             <pc:sldMk cId="3631881611" sldId="256"/>
             <ac:cxnSpMk id="1086" creationId="{9E313DE0-7A53-2698-E94D-8B341D219569}"/>
           </ac:cxnSpMkLst>
         </pc:cxnChg>
-        <pc:cxnChg chg="add del">
-          <ac:chgData name="Nicolas Rohrbeck" userId="97cf50ec-6fdd-4c3f-be9c-69633257c89c" providerId="ADAL" clId="{1E685613-085C-417C-ADF2-610F19D55445}" dt="2026-06-08T12:34:23.033" v="24" actId="478"/>
-          <ac:cxnSpMkLst>
-            <pc:docMk/>
-            <pc:sldMk cId="3631881611" sldId="256"/>
-            <ac:cxnSpMk id="1088" creationId="{8637173C-1235-4E5E-2AB4-7D0BA53809CA}"/>
-          </ac:cxnSpMkLst>
-        </pc:cxnChg>
-        <pc:cxnChg chg="add mod">
-          <ac:chgData name="Nicolas Rohrbeck" userId="97cf50ec-6fdd-4c3f-be9c-69633257c89c" providerId="ADAL" clId="{1E685613-085C-417C-ADF2-610F19D55445}" dt="2026-06-08T12:35:22.841" v="43" actId="1036"/>
+        <pc:cxnChg chg="add del mod">
+          <ac:chgData name="Nicolas Rohrbeck" userId="97cf50ec-6fdd-4c3f-be9c-69633257c89c" providerId="ADAL" clId="{1E685613-085C-417C-ADF2-610F19D55445}" dt="2026-06-10T11:34:10.003" v="56" actId="478"/>
           <ac:cxnSpMkLst>
             <pc:docMk/>
             <pc:sldMk cId="3631881611" sldId="256"/>
@@ -621,280 +834,6 @@
           </pc:spChg>
         </pc:sldLayoutChg>
       </pc:sldMasterChg>
-      <pc:sldMasterChg chg="modSp modSldLayout">
-        <pc:chgData name="Nicolas Rohrbeck" userId="97cf50ec-6fdd-4c3f-be9c-69633257c89c" providerId="ADAL" clId="{1E685613-085C-417C-ADF2-610F19D55445}" dt="2026-06-08T12:31:54.023" v="3"/>
-        <pc:sldMasterMkLst>
-          <pc:docMk/>
-          <pc:sldMasterMk cId="2486678735" sldId="2147483684"/>
-        </pc:sldMasterMkLst>
-        <pc:spChg chg="mod">
-          <ac:chgData name="Nicolas Rohrbeck" userId="97cf50ec-6fdd-4c3f-be9c-69633257c89c" providerId="ADAL" clId="{1E685613-085C-417C-ADF2-610F19D55445}" dt="2026-06-08T12:31:54.023" v="3"/>
-          <ac:spMkLst>
-            <pc:docMk/>
-            <pc:sldMasterMk cId="2486678735" sldId="2147483684"/>
-            <ac:spMk id="2" creationId="{00000000-0000-0000-0000-000000000000}"/>
-          </ac:spMkLst>
-        </pc:spChg>
-        <pc:spChg chg="mod">
-          <ac:chgData name="Nicolas Rohrbeck" userId="97cf50ec-6fdd-4c3f-be9c-69633257c89c" providerId="ADAL" clId="{1E685613-085C-417C-ADF2-610F19D55445}" dt="2026-06-08T12:31:54.023" v="3"/>
-          <ac:spMkLst>
-            <pc:docMk/>
-            <pc:sldMasterMk cId="2486678735" sldId="2147483684"/>
-            <ac:spMk id="3" creationId="{00000000-0000-0000-0000-000000000000}"/>
-          </ac:spMkLst>
-        </pc:spChg>
-        <pc:spChg chg="mod">
-          <ac:chgData name="Nicolas Rohrbeck" userId="97cf50ec-6fdd-4c3f-be9c-69633257c89c" providerId="ADAL" clId="{1E685613-085C-417C-ADF2-610F19D55445}" dt="2026-06-08T12:31:54.023" v="3"/>
-          <ac:spMkLst>
-            <pc:docMk/>
-            <pc:sldMasterMk cId="2486678735" sldId="2147483684"/>
-            <ac:spMk id="4" creationId="{00000000-0000-0000-0000-000000000000}"/>
-          </ac:spMkLst>
-        </pc:spChg>
-        <pc:spChg chg="mod">
-          <ac:chgData name="Nicolas Rohrbeck" userId="97cf50ec-6fdd-4c3f-be9c-69633257c89c" providerId="ADAL" clId="{1E685613-085C-417C-ADF2-610F19D55445}" dt="2026-06-08T12:31:54.023" v="3"/>
-          <ac:spMkLst>
-            <pc:docMk/>
-            <pc:sldMasterMk cId="2486678735" sldId="2147483684"/>
-            <ac:spMk id="5" creationId="{00000000-0000-0000-0000-000000000000}"/>
-          </ac:spMkLst>
-        </pc:spChg>
-        <pc:spChg chg="mod">
-          <ac:chgData name="Nicolas Rohrbeck" userId="97cf50ec-6fdd-4c3f-be9c-69633257c89c" providerId="ADAL" clId="{1E685613-085C-417C-ADF2-610F19D55445}" dt="2026-06-08T12:31:54.023" v="3"/>
-          <ac:spMkLst>
-            <pc:docMk/>
-            <pc:sldMasterMk cId="2486678735" sldId="2147483684"/>
-            <ac:spMk id="6" creationId="{00000000-0000-0000-0000-000000000000}"/>
-          </ac:spMkLst>
-        </pc:spChg>
-        <pc:sldLayoutChg chg="modSp">
-          <pc:chgData name="Nicolas Rohrbeck" userId="97cf50ec-6fdd-4c3f-be9c-69633257c89c" providerId="ADAL" clId="{1E685613-085C-417C-ADF2-610F19D55445}" dt="2026-06-08T12:31:54.023" v="3"/>
-          <pc:sldLayoutMkLst>
-            <pc:docMk/>
-            <pc:sldMasterMk cId="2486678735" sldId="2147483684"/>
-            <pc:sldLayoutMk cId="1741335800" sldId="2147483685"/>
-          </pc:sldLayoutMkLst>
-          <pc:spChg chg="mod">
-            <ac:chgData name="Nicolas Rohrbeck" userId="97cf50ec-6fdd-4c3f-be9c-69633257c89c" providerId="ADAL" clId="{1E685613-085C-417C-ADF2-610F19D55445}" dt="2026-06-08T12:31:54.023" v="3"/>
-            <ac:spMkLst>
-              <pc:docMk/>
-              <pc:sldMasterMk cId="2486678735" sldId="2147483684"/>
-              <pc:sldLayoutMk cId="1741335800" sldId="2147483685"/>
-              <ac:spMk id="2" creationId="{00000000-0000-0000-0000-000000000000}"/>
-            </ac:spMkLst>
-          </pc:spChg>
-          <pc:spChg chg="mod">
-            <ac:chgData name="Nicolas Rohrbeck" userId="97cf50ec-6fdd-4c3f-be9c-69633257c89c" providerId="ADAL" clId="{1E685613-085C-417C-ADF2-610F19D55445}" dt="2026-06-08T12:31:54.023" v="3"/>
-            <ac:spMkLst>
-              <pc:docMk/>
-              <pc:sldMasterMk cId="2486678735" sldId="2147483684"/>
-              <pc:sldLayoutMk cId="1741335800" sldId="2147483685"/>
-              <ac:spMk id="3" creationId="{00000000-0000-0000-0000-000000000000}"/>
-            </ac:spMkLst>
-          </pc:spChg>
-        </pc:sldLayoutChg>
-        <pc:sldLayoutChg chg="modSp">
-          <pc:chgData name="Nicolas Rohrbeck" userId="97cf50ec-6fdd-4c3f-be9c-69633257c89c" providerId="ADAL" clId="{1E685613-085C-417C-ADF2-610F19D55445}" dt="2026-06-08T12:31:54.023" v="3"/>
-          <pc:sldLayoutMkLst>
-            <pc:docMk/>
-            <pc:sldMasterMk cId="2486678735" sldId="2147483684"/>
-            <pc:sldLayoutMk cId="3490719254" sldId="2147483687"/>
-          </pc:sldLayoutMkLst>
-          <pc:spChg chg="mod">
-            <ac:chgData name="Nicolas Rohrbeck" userId="97cf50ec-6fdd-4c3f-be9c-69633257c89c" providerId="ADAL" clId="{1E685613-085C-417C-ADF2-610F19D55445}" dt="2026-06-08T12:31:54.023" v="3"/>
-            <ac:spMkLst>
-              <pc:docMk/>
-              <pc:sldMasterMk cId="2486678735" sldId="2147483684"/>
-              <pc:sldLayoutMk cId="3490719254" sldId="2147483687"/>
-              <ac:spMk id="2" creationId="{00000000-0000-0000-0000-000000000000}"/>
-            </ac:spMkLst>
-          </pc:spChg>
-          <pc:spChg chg="mod">
-            <ac:chgData name="Nicolas Rohrbeck" userId="97cf50ec-6fdd-4c3f-be9c-69633257c89c" providerId="ADAL" clId="{1E685613-085C-417C-ADF2-610F19D55445}" dt="2026-06-08T12:31:54.023" v="3"/>
-            <ac:spMkLst>
-              <pc:docMk/>
-              <pc:sldMasterMk cId="2486678735" sldId="2147483684"/>
-              <pc:sldLayoutMk cId="3490719254" sldId="2147483687"/>
-              <ac:spMk id="3" creationId="{00000000-0000-0000-0000-000000000000}"/>
-            </ac:spMkLst>
-          </pc:spChg>
-        </pc:sldLayoutChg>
-        <pc:sldLayoutChg chg="modSp">
-          <pc:chgData name="Nicolas Rohrbeck" userId="97cf50ec-6fdd-4c3f-be9c-69633257c89c" providerId="ADAL" clId="{1E685613-085C-417C-ADF2-610F19D55445}" dt="2026-06-08T12:31:54.023" v="3"/>
-          <pc:sldLayoutMkLst>
-            <pc:docMk/>
-            <pc:sldMasterMk cId="2486678735" sldId="2147483684"/>
-            <pc:sldLayoutMk cId="2960688409" sldId="2147483688"/>
-          </pc:sldLayoutMkLst>
-          <pc:spChg chg="mod">
-            <ac:chgData name="Nicolas Rohrbeck" userId="97cf50ec-6fdd-4c3f-be9c-69633257c89c" providerId="ADAL" clId="{1E685613-085C-417C-ADF2-610F19D55445}" dt="2026-06-08T12:31:54.023" v="3"/>
-            <ac:spMkLst>
-              <pc:docMk/>
-              <pc:sldMasterMk cId="2486678735" sldId="2147483684"/>
-              <pc:sldLayoutMk cId="2960688409" sldId="2147483688"/>
-              <ac:spMk id="3" creationId="{00000000-0000-0000-0000-000000000000}"/>
-            </ac:spMkLst>
-          </pc:spChg>
-          <pc:spChg chg="mod">
-            <ac:chgData name="Nicolas Rohrbeck" userId="97cf50ec-6fdd-4c3f-be9c-69633257c89c" providerId="ADAL" clId="{1E685613-085C-417C-ADF2-610F19D55445}" dt="2026-06-08T12:31:54.023" v="3"/>
-            <ac:spMkLst>
-              <pc:docMk/>
-              <pc:sldMasterMk cId="2486678735" sldId="2147483684"/>
-              <pc:sldLayoutMk cId="2960688409" sldId="2147483688"/>
-              <ac:spMk id="4" creationId="{00000000-0000-0000-0000-000000000000}"/>
-            </ac:spMkLst>
-          </pc:spChg>
-        </pc:sldLayoutChg>
-        <pc:sldLayoutChg chg="modSp">
-          <pc:chgData name="Nicolas Rohrbeck" userId="97cf50ec-6fdd-4c3f-be9c-69633257c89c" providerId="ADAL" clId="{1E685613-085C-417C-ADF2-610F19D55445}" dt="2026-06-08T12:31:54.023" v="3"/>
-          <pc:sldLayoutMkLst>
-            <pc:docMk/>
-            <pc:sldMasterMk cId="2486678735" sldId="2147483684"/>
-            <pc:sldLayoutMk cId="2108628214" sldId="2147483689"/>
-          </pc:sldLayoutMkLst>
-          <pc:spChg chg="mod">
-            <ac:chgData name="Nicolas Rohrbeck" userId="97cf50ec-6fdd-4c3f-be9c-69633257c89c" providerId="ADAL" clId="{1E685613-085C-417C-ADF2-610F19D55445}" dt="2026-06-08T12:31:54.023" v="3"/>
-            <ac:spMkLst>
-              <pc:docMk/>
-              <pc:sldMasterMk cId="2486678735" sldId="2147483684"/>
-              <pc:sldLayoutMk cId="2108628214" sldId="2147483689"/>
-              <ac:spMk id="2" creationId="{00000000-0000-0000-0000-000000000000}"/>
-            </ac:spMkLst>
-          </pc:spChg>
-          <pc:spChg chg="mod">
-            <ac:chgData name="Nicolas Rohrbeck" userId="97cf50ec-6fdd-4c3f-be9c-69633257c89c" providerId="ADAL" clId="{1E685613-085C-417C-ADF2-610F19D55445}" dt="2026-06-08T12:31:54.023" v="3"/>
-            <ac:spMkLst>
-              <pc:docMk/>
-              <pc:sldMasterMk cId="2486678735" sldId="2147483684"/>
-              <pc:sldLayoutMk cId="2108628214" sldId="2147483689"/>
-              <ac:spMk id="3" creationId="{00000000-0000-0000-0000-000000000000}"/>
-            </ac:spMkLst>
-          </pc:spChg>
-          <pc:spChg chg="mod">
-            <ac:chgData name="Nicolas Rohrbeck" userId="97cf50ec-6fdd-4c3f-be9c-69633257c89c" providerId="ADAL" clId="{1E685613-085C-417C-ADF2-610F19D55445}" dt="2026-06-08T12:31:54.023" v="3"/>
-            <ac:spMkLst>
-              <pc:docMk/>
-              <pc:sldMasterMk cId="2486678735" sldId="2147483684"/>
-              <pc:sldLayoutMk cId="2108628214" sldId="2147483689"/>
-              <ac:spMk id="4" creationId="{00000000-0000-0000-0000-000000000000}"/>
-            </ac:spMkLst>
-          </pc:spChg>
-          <pc:spChg chg="mod">
-            <ac:chgData name="Nicolas Rohrbeck" userId="97cf50ec-6fdd-4c3f-be9c-69633257c89c" providerId="ADAL" clId="{1E685613-085C-417C-ADF2-610F19D55445}" dt="2026-06-08T12:31:54.023" v="3"/>
-            <ac:spMkLst>
-              <pc:docMk/>
-              <pc:sldMasterMk cId="2486678735" sldId="2147483684"/>
-              <pc:sldLayoutMk cId="2108628214" sldId="2147483689"/>
-              <ac:spMk id="5" creationId="{00000000-0000-0000-0000-000000000000}"/>
-            </ac:spMkLst>
-          </pc:spChg>
-          <pc:spChg chg="mod">
-            <ac:chgData name="Nicolas Rohrbeck" userId="97cf50ec-6fdd-4c3f-be9c-69633257c89c" providerId="ADAL" clId="{1E685613-085C-417C-ADF2-610F19D55445}" dt="2026-06-08T12:31:54.023" v="3"/>
-            <ac:spMkLst>
-              <pc:docMk/>
-              <pc:sldMasterMk cId="2486678735" sldId="2147483684"/>
-              <pc:sldLayoutMk cId="2108628214" sldId="2147483689"/>
-              <ac:spMk id="6" creationId="{00000000-0000-0000-0000-000000000000}"/>
-            </ac:spMkLst>
-          </pc:spChg>
-        </pc:sldLayoutChg>
-        <pc:sldLayoutChg chg="modSp">
-          <pc:chgData name="Nicolas Rohrbeck" userId="97cf50ec-6fdd-4c3f-be9c-69633257c89c" providerId="ADAL" clId="{1E685613-085C-417C-ADF2-610F19D55445}" dt="2026-06-08T12:31:54.023" v="3"/>
-          <pc:sldLayoutMkLst>
-            <pc:docMk/>
-            <pc:sldMasterMk cId="2486678735" sldId="2147483684"/>
-            <pc:sldLayoutMk cId="2240894560" sldId="2147483692"/>
-          </pc:sldLayoutMkLst>
-          <pc:spChg chg="mod">
-            <ac:chgData name="Nicolas Rohrbeck" userId="97cf50ec-6fdd-4c3f-be9c-69633257c89c" providerId="ADAL" clId="{1E685613-085C-417C-ADF2-610F19D55445}" dt="2026-06-08T12:31:54.023" v="3"/>
-            <ac:spMkLst>
-              <pc:docMk/>
-              <pc:sldMasterMk cId="2486678735" sldId="2147483684"/>
-              <pc:sldLayoutMk cId="2240894560" sldId="2147483692"/>
-              <ac:spMk id="2" creationId="{00000000-0000-0000-0000-000000000000}"/>
-            </ac:spMkLst>
-          </pc:spChg>
-          <pc:spChg chg="mod">
-            <ac:chgData name="Nicolas Rohrbeck" userId="97cf50ec-6fdd-4c3f-be9c-69633257c89c" providerId="ADAL" clId="{1E685613-085C-417C-ADF2-610F19D55445}" dt="2026-06-08T12:31:54.023" v="3"/>
-            <ac:spMkLst>
-              <pc:docMk/>
-              <pc:sldMasterMk cId="2486678735" sldId="2147483684"/>
-              <pc:sldLayoutMk cId="2240894560" sldId="2147483692"/>
-              <ac:spMk id="3" creationId="{00000000-0000-0000-0000-000000000000}"/>
-            </ac:spMkLst>
-          </pc:spChg>
-          <pc:spChg chg="mod">
-            <ac:chgData name="Nicolas Rohrbeck" userId="97cf50ec-6fdd-4c3f-be9c-69633257c89c" providerId="ADAL" clId="{1E685613-085C-417C-ADF2-610F19D55445}" dt="2026-06-08T12:31:54.023" v="3"/>
-            <ac:spMkLst>
-              <pc:docMk/>
-              <pc:sldMasterMk cId="2486678735" sldId="2147483684"/>
-              <pc:sldLayoutMk cId="2240894560" sldId="2147483692"/>
-              <ac:spMk id="4" creationId="{00000000-0000-0000-0000-000000000000}"/>
-            </ac:spMkLst>
-          </pc:spChg>
-        </pc:sldLayoutChg>
-        <pc:sldLayoutChg chg="modSp">
-          <pc:chgData name="Nicolas Rohrbeck" userId="97cf50ec-6fdd-4c3f-be9c-69633257c89c" providerId="ADAL" clId="{1E685613-085C-417C-ADF2-610F19D55445}" dt="2026-06-08T12:31:54.023" v="3"/>
-          <pc:sldLayoutMkLst>
-            <pc:docMk/>
-            <pc:sldMasterMk cId="2486678735" sldId="2147483684"/>
-            <pc:sldLayoutMk cId="1179381967" sldId="2147483693"/>
-          </pc:sldLayoutMkLst>
-          <pc:spChg chg="mod">
-            <ac:chgData name="Nicolas Rohrbeck" userId="97cf50ec-6fdd-4c3f-be9c-69633257c89c" providerId="ADAL" clId="{1E685613-085C-417C-ADF2-610F19D55445}" dt="2026-06-08T12:31:54.023" v="3"/>
-            <ac:spMkLst>
-              <pc:docMk/>
-              <pc:sldMasterMk cId="2486678735" sldId="2147483684"/>
-              <pc:sldLayoutMk cId="1179381967" sldId="2147483693"/>
-              <ac:spMk id="2" creationId="{00000000-0000-0000-0000-000000000000}"/>
-            </ac:spMkLst>
-          </pc:spChg>
-          <pc:spChg chg="mod">
-            <ac:chgData name="Nicolas Rohrbeck" userId="97cf50ec-6fdd-4c3f-be9c-69633257c89c" providerId="ADAL" clId="{1E685613-085C-417C-ADF2-610F19D55445}" dt="2026-06-08T12:31:54.023" v="3"/>
-            <ac:spMkLst>
-              <pc:docMk/>
-              <pc:sldMasterMk cId="2486678735" sldId="2147483684"/>
-              <pc:sldLayoutMk cId="1179381967" sldId="2147483693"/>
-              <ac:spMk id="3" creationId="{00000000-0000-0000-0000-000000000000}"/>
-            </ac:spMkLst>
-          </pc:spChg>
-          <pc:spChg chg="mod">
-            <ac:chgData name="Nicolas Rohrbeck" userId="97cf50ec-6fdd-4c3f-be9c-69633257c89c" providerId="ADAL" clId="{1E685613-085C-417C-ADF2-610F19D55445}" dt="2026-06-08T12:31:54.023" v="3"/>
-            <ac:spMkLst>
-              <pc:docMk/>
-              <pc:sldMasterMk cId="2486678735" sldId="2147483684"/>
-              <pc:sldLayoutMk cId="1179381967" sldId="2147483693"/>
-              <ac:spMk id="4" creationId="{00000000-0000-0000-0000-000000000000}"/>
-            </ac:spMkLst>
-          </pc:spChg>
-        </pc:sldLayoutChg>
-        <pc:sldLayoutChg chg="modSp">
-          <pc:chgData name="Nicolas Rohrbeck" userId="97cf50ec-6fdd-4c3f-be9c-69633257c89c" providerId="ADAL" clId="{1E685613-085C-417C-ADF2-610F19D55445}" dt="2026-06-08T12:31:54.023" v="3"/>
-          <pc:sldLayoutMkLst>
-            <pc:docMk/>
-            <pc:sldMasterMk cId="2486678735" sldId="2147483684"/>
-            <pc:sldLayoutMk cId="1761398408" sldId="2147483695"/>
-          </pc:sldLayoutMkLst>
-          <pc:spChg chg="mod">
-            <ac:chgData name="Nicolas Rohrbeck" userId="97cf50ec-6fdd-4c3f-be9c-69633257c89c" providerId="ADAL" clId="{1E685613-085C-417C-ADF2-610F19D55445}" dt="2026-06-08T12:31:54.023" v="3"/>
-            <ac:spMkLst>
-              <pc:docMk/>
-              <pc:sldMasterMk cId="2486678735" sldId="2147483684"/>
-              <pc:sldLayoutMk cId="1761398408" sldId="2147483695"/>
-              <ac:spMk id="2" creationId="{00000000-0000-0000-0000-000000000000}"/>
-            </ac:spMkLst>
-          </pc:spChg>
-          <pc:spChg chg="mod">
-            <ac:chgData name="Nicolas Rohrbeck" userId="97cf50ec-6fdd-4c3f-be9c-69633257c89c" providerId="ADAL" clId="{1E685613-085C-417C-ADF2-610F19D55445}" dt="2026-06-08T12:31:54.023" v="3"/>
-            <ac:spMkLst>
-              <pc:docMk/>
-              <pc:sldMasterMk cId="2486678735" sldId="2147483684"/>
-              <pc:sldLayoutMk cId="1761398408" sldId="2147483695"/>
-              <ac:spMk id="3" creationId="{00000000-0000-0000-0000-000000000000}"/>
-            </ac:spMkLst>
-          </pc:spChg>
-        </pc:sldLayoutChg>
-      </pc:sldMasterChg>
     </pc:docChg>
   </pc:docChgLst>
 </pc:chgInfo>
@@ -1031,7 +970,7 @@
           <a:p>
             <a:fld id="{B493A43F-43CC-4979-8D32-E5ADDA61DC9E}" type="datetimeFigureOut">
               <a:rPr lang="de-DE" smtClean="0"/>
-              <a:t>08.06.2026</a:t>
+              <a:t>10.06.2026</a:t>
             </a:fld>
             <a:endParaRPr lang="de-DE"/>
           </a:p>
@@ -1201,7 +1140,7 @@
           <a:p>
             <a:fld id="{B493A43F-43CC-4979-8D32-E5ADDA61DC9E}" type="datetimeFigureOut">
               <a:rPr lang="de-DE" smtClean="0"/>
-              <a:t>08.06.2026</a:t>
+              <a:t>10.06.2026</a:t>
             </a:fld>
             <a:endParaRPr lang="de-DE"/>
           </a:p>
@@ -1381,7 +1320,7 @@
           <a:p>
             <a:fld id="{B493A43F-43CC-4979-8D32-E5ADDA61DC9E}" type="datetimeFigureOut">
               <a:rPr lang="de-DE" smtClean="0"/>
-              <a:t>08.06.2026</a:t>
+              <a:t>10.06.2026</a:t>
             </a:fld>
             <a:endParaRPr lang="de-DE"/>
           </a:p>
@@ -1551,7 +1490,7 @@
           <a:p>
             <a:fld id="{B493A43F-43CC-4979-8D32-E5ADDA61DC9E}" type="datetimeFigureOut">
               <a:rPr lang="de-DE" smtClean="0"/>
-              <a:t>08.06.2026</a:t>
+              <a:t>10.06.2026</a:t>
             </a:fld>
             <a:endParaRPr lang="de-DE"/>
           </a:p>
@@ -1797,7 +1736,7 @@
           <a:p>
             <a:fld id="{B493A43F-43CC-4979-8D32-E5ADDA61DC9E}" type="datetimeFigureOut">
               <a:rPr lang="de-DE" smtClean="0"/>
-              <a:t>08.06.2026</a:t>
+              <a:t>10.06.2026</a:t>
             </a:fld>
             <a:endParaRPr lang="de-DE"/>
           </a:p>
@@ -2029,7 +1968,7 @@
           <a:p>
             <a:fld id="{B493A43F-43CC-4979-8D32-E5ADDA61DC9E}" type="datetimeFigureOut">
               <a:rPr lang="de-DE" smtClean="0"/>
-              <a:t>08.06.2026</a:t>
+              <a:t>10.06.2026</a:t>
             </a:fld>
             <a:endParaRPr lang="de-DE"/>
           </a:p>
@@ -2396,7 +2335,7 @@
           <a:p>
             <a:fld id="{B493A43F-43CC-4979-8D32-E5ADDA61DC9E}" type="datetimeFigureOut">
               <a:rPr lang="de-DE" smtClean="0"/>
-              <a:t>08.06.2026</a:t>
+              <a:t>10.06.2026</a:t>
             </a:fld>
             <a:endParaRPr lang="de-DE"/>
           </a:p>
@@ -2514,7 +2453,7 @@
           <a:p>
             <a:fld id="{B493A43F-43CC-4979-8D32-E5ADDA61DC9E}" type="datetimeFigureOut">
               <a:rPr lang="de-DE" smtClean="0"/>
-              <a:t>08.06.2026</a:t>
+              <a:t>10.06.2026</a:t>
             </a:fld>
             <a:endParaRPr lang="de-DE"/>
           </a:p>
@@ -2609,7 +2548,7 @@
           <a:p>
             <a:fld id="{B493A43F-43CC-4979-8D32-E5ADDA61DC9E}" type="datetimeFigureOut">
               <a:rPr lang="de-DE" smtClean="0"/>
-              <a:t>08.06.2026</a:t>
+              <a:t>10.06.2026</a:t>
             </a:fld>
             <a:endParaRPr lang="de-DE"/>
           </a:p>
@@ -2886,7 +2825,7 @@
           <a:p>
             <a:fld id="{B493A43F-43CC-4979-8D32-E5ADDA61DC9E}" type="datetimeFigureOut">
               <a:rPr lang="de-DE" smtClean="0"/>
-              <a:t>08.06.2026</a:t>
+              <a:t>10.06.2026</a:t>
             </a:fld>
             <a:endParaRPr lang="de-DE"/>
           </a:p>
@@ -3143,7 +3082,7 @@
           <a:p>
             <a:fld id="{B493A43F-43CC-4979-8D32-E5ADDA61DC9E}" type="datetimeFigureOut">
               <a:rPr lang="de-DE" smtClean="0"/>
-              <a:t>08.06.2026</a:t>
+              <a:t>10.06.2026</a:t>
             </a:fld>
             <a:endParaRPr lang="de-DE"/>
           </a:p>
@@ -3356,7 +3295,7 @@
           <a:p>
             <a:fld id="{B493A43F-43CC-4979-8D32-E5ADDA61DC9E}" type="datetimeFigureOut">
               <a:rPr lang="de-DE" smtClean="0"/>
-              <a:t>08.06.2026</a:t>
+              <a:t>10.06.2026</a:t>
             </a:fld>
             <a:endParaRPr lang="de-DE"/>
           </a:p>
@@ -3808,6 +3747,60 @@
       </p:pic>
       <p:sp>
         <p:nvSpPr>
+          <p:cNvPr id="52" name="Rectangle 51">
+            <a:extLst>
+              <a:ext uri="{FF2B5EF4-FFF2-40B4-BE49-F238E27FC236}">
+                <a16:creationId xmlns:a16="http://schemas.microsoft.com/office/drawing/2014/main" id="{65FE92F4-14C3-3F52-447F-00F7FC710145}"/>
+              </a:ext>
+            </a:extLst>
+          </p:cNvPr>
+          <p:cNvSpPr/>
+          <p:nvPr/>
+        </p:nvSpPr>
+        <p:spPr>
+          <a:xfrm>
+            <a:off x="11795125" y="2682947"/>
+            <a:ext cx="1396993" cy="2444678"/>
+          </a:xfrm>
+          <a:prstGeom prst="rect">
+            <a:avLst/>
+          </a:prstGeom>
+          <a:solidFill>
+            <a:schemeClr val="bg1">
+              <a:lumMod val="85000"/>
+            </a:schemeClr>
+          </a:solidFill>
+          <a:ln>
+            <a:prstDash val="dash"/>
+          </a:ln>
+        </p:spPr>
+        <p:style>
+          <a:lnRef idx="2">
+            <a:schemeClr val="accent1">
+              <a:shade val="15000"/>
+            </a:schemeClr>
+          </a:lnRef>
+          <a:fillRef idx="1">
+            <a:schemeClr val="accent1"/>
+          </a:fillRef>
+          <a:effectRef idx="0">
+            <a:schemeClr val="accent1"/>
+          </a:effectRef>
+          <a:fontRef idx="minor">
+            <a:schemeClr val="lt1"/>
+          </a:fontRef>
+        </p:style>
+        <p:txBody>
+          <a:bodyPr rtlCol="0" anchor="ctr"/>
+          <a:lstStyle/>
+          <a:p>
+            <a:pPr algn="ctr"/>
+            <a:endParaRPr lang="de-DE"/>
+          </a:p>
+        </p:txBody>
+      </p:sp>
+      <p:sp>
+        <p:nvSpPr>
           <p:cNvPr id="6" name="Rectangle 5">
             <a:extLst>
               <a:ext uri="{FF2B5EF4-FFF2-40B4-BE49-F238E27FC236}">
@@ -4828,45 +4821,6 @@
       </p:cxnSp>
       <p:cxnSp>
         <p:nvCxnSpPr>
-          <p:cNvPr id="63" name="Straight Connector 62">
-            <a:extLst>
-              <a:ext uri="{FF2B5EF4-FFF2-40B4-BE49-F238E27FC236}">
-                <a16:creationId xmlns:a16="http://schemas.microsoft.com/office/drawing/2014/main" id="{DF982F10-5253-318A-9A3B-7444938F2C29}"/>
-              </a:ext>
-            </a:extLst>
-          </p:cNvPr>
-          <p:cNvCxnSpPr>
-            <a:cxnSpLocks/>
-          </p:cNvCxnSpPr>
-          <p:nvPr/>
-        </p:nvCxnSpPr>
-        <p:spPr>
-          <a:xfrm>
-            <a:off x="12478947" y="3854424"/>
-            <a:ext cx="10816" cy="1493878"/>
-          </a:xfrm>
-          <a:prstGeom prst="line">
-            <a:avLst/>
-          </a:prstGeom>
-          <a:ln w="38100"/>
-        </p:spPr>
-        <p:style>
-          <a:lnRef idx="2">
-            <a:schemeClr val="dk1"/>
-          </a:lnRef>
-          <a:fillRef idx="0">
-            <a:schemeClr val="dk1"/>
-          </a:fillRef>
-          <a:effectRef idx="1">
-            <a:schemeClr val="dk1"/>
-          </a:effectRef>
-          <a:fontRef idx="minor">
-            <a:schemeClr val="tx1"/>
-          </a:fontRef>
-        </p:style>
-      </p:cxnSp>
-      <p:cxnSp>
-        <p:nvCxnSpPr>
           <p:cNvPr id="65" name="Straight Connector 64">
             <a:extLst>
               <a:ext uri="{FF2B5EF4-FFF2-40B4-BE49-F238E27FC236}">
@@ -4883,252 +4837,6 @@
           <a:xfrm flipH="1">
             <a:off x="11629738" y="5326249"/>
             <a:ext cx="863626" cy="0"/>
-          </a:xfrm>
-          <a:prstGeom prst="line">
-            <a:avLst/>
-          </a:prstGeom>
-          <a:ln w="38100"/>
-        </p:spPr>
-        <p:style>
-          <a:lnRef idx="2">
-            <a:schemeClr val="dk1"/>
-          </a:lnRef>
-          <a:fillRef idx="0">
-            <a:schemeClr val="dk1"/>
-          </a:fillRef>
-          <a:effectRef idx="1">
-            <a:schemeClr val="dk1"/>
-          </a:effectRef>
-          <a:fontRef idx="minor">
-            <a:schemeClr val="tx1"/>
-          </a:fontRef>
-        </p:style>
-      </p:cxnSp>
-      <p:cxnSp>
-        <p:nvCxnSpPr>
-          <p:cNvPr id="67" name="Straight Connector 66">
-            <a:extLst>
-              <a:ext uri="{FF2B5EF4-FFF2-40B4-BE49-F238E27FC236}">
-                <a16:creationId xmlns:a16="http://schemas.microsoft.com/office/drawing/2014/main" id="{56F9D3F1-763C-BC12-46D8-33A611A6BF18}"/>
-              </a:ext>
-            </a:extLst>
-          </p:cNvPr>
-          <p:cNvCxnSpPr>
-            <a:cxnSpLocks/>
-          </p:cNvCxnSpPr>
-          <p:nvPr/>
-        </p:nvCxnSpPr>
-        <p:spPr>
-          <a:xfrm flipH="1">
-            <a:off x="11612078" y="3874389"/>
-            <a:ext cx="872922" cy="0"/>
-          </a:xfrm>
-          <a:prstGeom prst="line">
-            <a:avLst/>
-          </a:prstGeom>
-          <a:ln w="38100"/>
-        </p:spPr>
-        <p:style>
-          <a:lnRef idx="2">
-            <a:schemeClr val="dk1"/>
-          </a:lnRef>
-          <a:fillRef idx="0">
-            <a:schemeClr val="dk1"/>
-          </a:fillRef>
-          <a:effectRef idx="1">
-            <a:schemeClr val="dk1"/>
-          </a:effectRef>
-          <a:fontRef idx="minor">
-            <a:schemeClr val="tx1"/>
-          </a:fontRef>
-        </p:style>
-      </p:cxnSp>
-      <p:sp>
-        <p:nvSpPr>
-          <p:cNvPr id="62" name="Oval 61">
-            <a:extLst>
-              <a:ext uri="{FF2B5EF4-FFF2-40B4-BE49-F238E27FC236}">
-                <a16:creationId xmlns:a16="http://schemas.microsoft.com/office/drawing/2014/main" id="{C65333D7-4191-D113-43F6-9E55E279F162}"/>
-              </a:ext>
-            </a:extLst>
-          </p:cNvPr>
-          <p:cNvSpPr>
-            <a:spLocks/>
-          </p:cNvSpPr>
-          <p:nvPr/>
-        </p:nvSpPr>
-        <p:spPr>
-          <a:xfrm>
-            <a:off x="12060042" y="4207113"/>
-            <a:ext cx="849917" cy="820253"/>
-          </a:xfrm>
-          <a:prstGeom prst="ellipse">
-            <a:avLst/>
-          </a:prstGeom>
-          <a:ln w="38100"/>
-        </p:spPr>
-        <p:style>
-          <a:lnRef idx="2">
-            <a:schemeClr val="dk1"/>
-          </a:lnRef>
-          <a:fillRef idx="1">
-            <a:schemeClr val="lt1"/>
-          </a:fillRef>
-          <a:effectRef idx="0">
-            <a:schemeClr val="dk1"/>
-          </a:effectRef>
-          <a:fontRef idx="minor">
-            <a:schemeClr val="dk1"/>
-          </a:fontRef>
-        </p:style>
-        <p:txBody>
-          <a:bodyPr rtlCol="0" anchor="ctr"/>
-          <a:lstStyle/>
-          <a:p>
-            <a:pPr algn="ctr"/>
-            <a:r>
-              <a:rPr lang="en-GB" sz="1543"/>
-              <a:t>CH2</a:t>
-            </a:r>
-            <a:endParaRPr lang="de-DE" sz="1543"/>
-          </a:p>
-        </p:txBody>
-      </p:sp>
-      <p:cxnSp>
-        <p:nvCxnSpPr>
-          <p:cNvPr id="72" name="Straight Connector 71">
-            <a:extLst>
-              <a:ext uri="{FF2B5EF4-FFF2-40B4-BE49-F238E27FC236}">
-                <a16:creationId xmlns:a16="http://schemas.microsoft.com/office/drawing/2014/main" id="{934CF841-0DA4-5679-294B-310608964CE2}"/>
-              </a:ext>
-            </a:extLst>
-          </p:cNvPr>
-          <p:cNvCxnSpPr>
-            <a:cxnSpLocks/>
-          </p:cNvCxnSpPr>
-          <p:nvPr/>
-        </p:nvCxnSpPr>
-        <p:spPr>
-          <a:xfrm>
-            <a:off x="12327416" y="4391919"/>
-            <a:ext cx="298442" cy="0"/>
-          </a:xfrm>
-          <a:prstGeom prst="line">
-            <a:avLst/>
-          </a:prstGeom>
-          <a:ln w="38100"/>
-        </p:spPr>
-        <p:style>
-          <a:lnRef idx="2">
-            <a:schemeClr val="dk1"/>
-          </a:lnRef>
-          <a:fillRef idx="0">
-            <a:schemeClr val="dk1"/>
-          </a:fillRef>
-          <a:effectRef idx="1">
-            <a:schemeClr val="dk1"/>
-          </a:effectRef>
-          <a:fontRef idx="minor">
-            <a:schemeClr val="tx1"/>
-          </a:fontRef>
-        </p:style>
-      </p:cxnSp>
-      <p:cxnSp>
-        <p:nvCxnSpPr>
-          <p:cNvPr id="73" name="Straight Connector 72">
-            <a:extLst>
-              <a:ext uri="{FF2B5EF4-FFF2-40B4-BE49-F238E27FC236}">
-                <a16:creationId xmlns:a16="http://schemas.microsoft.com/office/drawing/2014/main" id="{F4371F28-1504-9BD3-1D74-1015CE7010DE}"/>
-              </a:ext>
-            </a:extLst>
-          </p:cNvPr>
-          <p:cNvCxnSpPr>
-            <a:cxnSpLocks/>
-          </p:cNvCxnSpPr>
-          <p:nvPr/>
-        </p:nvCxnSpPr>
-        <p:spPr>
-          <a:xfrm>
-            <a:off x="12335779" y="4853008"/>
-            <a:ext cx="298442" cy="0"/>
-          </a:xfrm>
-          <a:prstGeom prst="line">
-            <a:avLst/>
-          </a:prstGeom>
-          <a:ln w="38100"/>
-        </p:spPr>
-        <p:style>
-          <a:lnRef idx="2">
-            <a:schemeClr val="dk1"/>
-          </a:lnRef>
-          <a:fillRef idx="0">
-            <a:schemeClr val="dk1"/>
-          </a:fillRef>
-          <a:effectRef idx="1">
-            <a:schemeClr val="dk1"/>
-          </a:effectRef>
-          <a:fontRef idx="minor">
-            <a:schemeClr val="tx1"/>
-          </a:fontRef>
-        </p:style>
-      </p:cxnSp>
-      <p:cxnSp>
-        <p:nvCxnSpPr>
-          <p:cNvPr id="74" name="Straight Connector 73">
-            <a:extLst>
-              <a:ext uri="{FF2B5EF4-FFF2-40B4-BE49-F238E27FC236}">
-                <a16:creationId xmlns:a16="http://schemas.microsoft.com/office/drawing/2014/main" id="{AFBE105A-6772-02FE-EAA8-9F65DD0C1AB2}"/>
-              </a:ext>
-            </a:extLst>
-          </p:cNvPr>
-          <p:cNvCxnSpPr>
-            <a:cxnSpLocks/>
-          </p:cNvCxnSpPr>
-          <p:nvPr/>
-        </p:nvCxnSpPr>
-        <p:spPr>
-          <a:xfrm>
-            <a:off x="12485000" y="4221419"/>
-            <a:ext cx="0" cy="170500"/>
-          </a:xfrm>
-          <a:prstGeom prst="line">
-            <a:avLst/>
-          </a:prstGeom>
-          <a:ln w="38100"/>
-        </p:spPr>
-        <p:style>
-          <a:lnRef idx="2">
-            <a:schemeClr val="dk1"/>
-          </a:lnRef>
-          <a:fillRef idx="0">
-            <a:schemeClr val="dk1"/>
-          </a:fillRef>
-          <a:effectRef idx="1">
-            <a:schemeClr val="dk1"/>
-          </a:effectRef>
-          <a:fontRef idx="minor">
-            <a:schemeClr val="tx1"/>
-          </a:fontRef>
-        </p:style>
-      </p:cxnSp>
-      <p:cxnSp>
-        <p:nvCxnSpPr>
-          <p:cNvPr id="76" name="Straight Connector 75">
-            <a:extLst>
-              <a:ext uri="{FF2B5EF4-FFF2-40B4-BE49-F238E27FC236}">
-                <a16:creationId xmlns:a16="http://schemas.microsoft.com/office/drawing/2014/main" id="{8D4C6542-4F3A-6BEB-EC9F-BF9144D80A07}"/>
-              </a:ext>
-            </a:extLst>
-          </p:cNvPr>
-          <p:cNvCxnSpPr>
-            <a:cxnSpLocks/>
-          </p:cNvCxnSpPr>
-          <p:nvPr/>
-        </p:nvCxnSpPr>
-        <p:spPr>
-          <a:xfrm>
-            <a:off x="12487286" y="4856866"/>
-            <a:ext cx="0" cy="170500"/>
           </a:xfrm>
           <a:prstGeom prst="line">
             <a:avLst/>
@@ -5166,13 +4874,13 @@
         </p:nvCxnSpPr>
         <p:spPr>
           <a:xfrm>
-            <a:off x="6564810" y="2119591"/>
+            <a:off x="6564810" y="2125941"/>
             <a:ext cx="0" cy="672423"/>
           </a:xfrm>
           <a:prstGeom prst="line">
             <a:avLst/>
           </a:prstGeom>
-          <a:ln w="57150"/>
+          <a:ln w="38100"/>
         </p:spPr>
         <p:style>
           <a:lnRef idx="2">
@@ -5205,13 +4913,13 @@
         </p:nvCxnSpPr>
         <p:spPr>
           <a:xfrm>
-            <a:off x="9280340" y="2117323"/>
+            <a:off x="9280340" y="2126848"/>
             <a:ext cx="0" cy="678262"/>
           </a:xfrm>
           <a:prstGeom prst="line">
             <a:avLst/>
           </a:prstGeom>
-          <a:ln w="57150"/>
+          <a:ln w="38100"/>
         </p:spPr>
         <p:style>
           <a:lnRef idx="2">
@@ -5228,53 +4936,6 @@
           </a:fontRef>
         </p:style>
       </p:cxnSp>
-      <p:pic>
-        <p:nvPicPr>
-          <p:cNvPr id="1028" name="Picture 4" descr="Generator Symbols - ClipArt Best">
-            <a:extLst>
-              <a:ext uri="{FF2B5EF4-FFF2-40B4-BE49-F238E27FC236}">
-                <a16:creationId xmlns:a16="http://schemas.microsoft.com/office/drawing/2014/main" id="{D2A6BE49-3976-D018-7DCF-D44CFBB9CB84}"/>
-              </a:ext>
-            </a:extLst>
-          </p:cNvPr>
-          <p:cNvPicPr>
-            <a:picLocks noChangeAspect="1" noChangeArrowheads="1"/>
-          </p:cNvPicPr>
-          <p:nvPr/>
-        </p:nvPicPr>
-        <p:blipFill>
-          <a:blip r:embed="rId3">
-            <a:extLst>
-              <a:ext uri="{28A0092B-C50C-407E-A947-70E740481C1C}">
-                <a14:useLocalDpi xmlns:a14="http://schemas.microsoft.com/office/drawing/2010/main" val="0"/>
-              </a:ext>
-            </a:extLst>
-          </a:blip>
-          <a:srcRect/>
-          <a:stretch>
-            <a:fillRect/>
-          </a:stretch>
-        </p:blipFill>
-        <p:spPr bwMode="auto">
-          <a:xfrm>
-            <a:off x="5227595" y="1008350"/>
-            <a:ext cx="1337215" cy="873368"/>
-          </a:xfrm>
-          <a:prstGeom prst="rect">
-            <a:avLst/>
-          </a:prstGeom>
-          <a:noFill/>
-          <a:extLst>
-            <a:ext uri="{909E8E84-426E-40DD-AFC4-6F175D3DCCD1}">
-              <a14:hiddenFill xmlns:a14="http://schemas.microsoft.com/office/drawing/2010/main">
-                <a:solidFill>
-                  <a:srgbClr val="FFFFFF"/>
-                </a:solidFill>
-              </a14:hiddenFill>
-            </a:ext>
-          </a:extLst>
-        </p:spPr>
-      </p:pic>
       <p:sp>
         <p:nvSpPr>
           <p:cNvPr id="1033" name="Rectangle 1032">
@@ -5470,53 +5131,6 @@
           </a:fontRef>
         </p:style>
       </p:cxnSp>
-      <p:sp>
-        <p:nvSpPr>
-          <p:cNvPr id="1034" name="Isosceles Triangle 1033">
-            <a:extLst>
-              <a:ext uri="{FF2B5EF4-FFF2-40B4-BE49-F238E27FC236}">
-                <a16:creationId xmlns:a16="http://schemas.microsoft.com/office/drawing/2014/main" id="{4AB8D5BC-E9FB-9624-A74B-8815CCABF3F8}"/>
-              </a:ext>
-            </a:extLst>
-          </p:cNvPr>
-          <p:cNvSpPr>
-            <a:spLocks/>
-          </p:cNvSpPr>
-          <p:nvPr/>
-        </p:nvSpPr>
-        <p:spPr>
-          <a:xfrm rot="5400000">
-            <a:off x="7265330" y="1193316"/>
-            <a:ext cx="556461" cy="520241"/>
-          </a:xfrm>
-          <a:prstGeom prst="triangle">
-            <a:avLst/>
-          </a:prstGeom>
-          <a:ln w="38100"/>
-        </p:spPr>
-        <p:style>
-          <a:lnRef idx="2">
-            <a:schemeClr val="dk1"/>
-          </a:lnRef>
-          <a:fillRef idx="1">
-            <a:schemeClr val="lt1"/>
-          </a:fillRef>
-          <a:effectRef idx="0">
-            <a:schemeClr val="dk1"/>
-          </a:effectRef>
-          <a:fontRef idx="minor">
-            <a:schemeClr val="dk1"/>
-          </a:fontRef>
-        </p:style>
-        <p:txBody>
-          <a:bodyPr rtlCol="0" anchor="ctr"/>
-          <a:lstStyle/>
-          <a:p>
-            <a:pPr algn="ctr"/>
-            <a:endParaRPr lang="de-DE" sz="1543"/>
-          </a:p>
-        </p:txBody>
-      </p:sp>
       <p:cxnSp>
         <p:nvCxnSpPr>
           <p:cNvPr id="1038" name="Straight Connector 1037">
@@ -5539,7 +5153,7 @@
           <a:prstGeom prst="line">
             <a:avLst/>
           </a:prstGeom>
-          <a:ln w="57150"/>
+          <a:ln w="38100"/>
         </p:spPr>
         <p:style>
           <a:lnRef idx="2">
@@ -5556,26 +5170,66 @@
           </a:fontRef>
         </p:style>
       </p:cxnSp>
-      <p:sp>
-        <p:nvSpPr>
-          <p:cNvPr id="1044" name="Oval 1043">
+      <p:cxnSp>
+        <p:nvCxnSpPr>
+          <p:cNvPr id="12" name="Straight Connector 11">
             <a:extLst>
               <a:ext uri="{FF2B5EF4-FFF2-40B4-BE49-F238E27FC236}">
-                <a16:creationId xmlns:a16="http://schemas.microsoft.com/office/drawing/2014/main" id="{3CC806F6-4699-36DF-60AA-EF3FFCFBDB52}"/>
+                <a16:creationId xmlns:a16="http://schemas.microsoft.com/office/drawing/2014/main" id="{D9053A82-7678-CFB8-DD7B-7D4138B67B38}"/>
               </a:ext>
             </a:extLst>
           </p:cNvPr>
+          <p:cNvCxnSpPr>
+            <a:cxnSpLocks/>
+            <a:endCxn id="45" idx="2"/>
+          </p:cNvCxnSpPr>
+          <p:nvPr/>
+        </p:nvCxnSpPr>
+        <p:spPr>
+          <a:xfrm flipV="1">
+            <a:off x="9280340" y="2143046"/>
+            <a:ext cx="3463058" cy="3857"/>
+          </a:xfrm>
+          <a:prstGeom prst="line">
+            <a:avLst/>
+          </a:prstGeom>
+          <a:ln w="38100"/>
+        </p:spPr>
+        <p:style>
+          <a:lnRef idx="2">
+            <a:schemeClr val="dk1"/>
+          </a:lnRef>
+          <a:fillRef idx="0">
+            <a:schemeClr val="dk1"/>
+          </a:fillRef>
+          <a:effectRef idx="1">
+            <a:schemeClr val="dk1"/>
+          </a:effectRef>
+          <a:fontRef idx="minor">
+            <a:schemeClr val="tx1"/>
+          </a:fontRef>
+        </p:style>
+      </p:cxnSp>
+      <p:sp>
+        <p:nvSpPr>
+          <p:cNvPr id="1034" name="Isosceles Triangle 1033">
+            <a:extLst>
+              <a:ext uri="{FF2B5EF4-FFF2-40B4-BE49-F238E27FC236}">
+                <a16:creationId xmlns:a16="http://schemas.microsoft.com/office/drawing/2014/main" id="{4AB8D5BC-E9FB-9624-A74B-8815CCABF3F8}"/>
+              </a:ext>
+            </a:extLst>
+          </p:cNvPr>
           <p:cNvSpPr>
             <a:spLocks/>
           </p:cNvSpPr>
           <p:nvPr/>
         </p:nvSpPr>
         <p:spPr>
-          <a:xfrm>
-            <a:off x="3561479" y="1032629"/>
-            <a:ext cx="849917" cy="820253"/>
-          </a:xfrm>
-          <a:prstGeom prst="ellipse">
+          <a:xfrm rot="16200000">
+            <a:off x="9710928" y="1886783"/>
+            <a:ext cx="556461" cy="520241"/>
+          </a:xfrm>
+          <a:prstGeom prst="triangle">
             <a:avLst/>
           </a:prstGeom>
           <a:ln w="38100"/>
@@ -5599,20 +5253,93 @@
           <a:lstStyle/>
           <a:p>
             <a:pPr algn="ctr"/>
-            <a:r>
-              <a:rPr lang="en-GB" sz="1543"/>
-              <a:t>CH1</a:t>
-            </a:r>
             <a:endParaRPr lang="de-DE" sz="1543"/>
           </a:p>
         </p:txBody>
       </p:sp>
       <p:cxnSp>
         <p:nvCxnSpPr>
-          <p:cNvPr id="1045" name="Straight Connector 1044">
+          <p:cNvPr id="30" name="Straight Connector 29">
             <a:extLst>
               <a:ext uri="{FF2B5EF4-FFF2-40B4-BE49-F238E27FC236}">
-                <a16:creationId xmlns:a16="http://schemas.microsoft.com/office/drawing/2014/main" id="{EC15636A-6E94-48F8-8E3B-808AA82F4C42}"/>
+                <a16:creationId xmlns:a16="http://schemas.microsoft.com/office/drawing/2014/main" id="{4AFAC6D2-4AE8-3109-EB75-09331293D8EE}"/>
+              </a:ext>
+            </a:extLst>
+          </p:cNvPr>
+          <p:cNvCxnSpPr>
+            <a:cxnSpLocks/>
+            <a:stCxn id="45" idx="6"/>
+          </p:cNvCxnSpPr>
+          <p:nvPr/>
+        </p:nvCxnSpPr>
+        <p:spPr>
+          <a:xfrm>
+            <a:off x="13592405" y="2143046"/>
+            <a:ext cx="378865" cy="0"/>
+          </a:xfrm>
+          <a:prstGeom prst="line">
+            <a:avLst/>
+          </a:prstGeom>
+          <a:ln w="38100"/>
+        </p:spPr>
+        <p:style>
+          <a:lnRef idx="2">
+            <a:schemeClr val="dk1"/>
+          </a:lnRef>
+          <a:fillRef idx="0">
+            <a:schemeClr val="dk1"/>
+          </a:fillRef>
+          <a:effectRef idx="1">
+            <a:schemeClr val="dk1"/>
+          </a:effectRef>
+          <a:fontRef idx="minor">
+            <a:schemeClr val="tx1"/>
+          </a:fontRef>
+        </p:style>
+      </p:cxnSp>
+      <p:cxnSp>
+        <p:nvCxnSpPr>
+          <p:cNvPr id="34" name="Straight Connector 33">
+            <a:extLst>
+              <a:ext uri="{FF2B5EF4-FFF2-40B4-BE49-F238E27FC236}">
+                <a16:creationId xmlns:a16="http://schemas.microsoft.com/office/drawing/2014/main" id="{754A1DFE-238E-79AD-57CE-BBFC9E9669A1}"/>
+              </a:ext>
+            </a:extLst>
+          </p:cNvPr>
+          <p:cNvCxnSpPr/>
+          <p:nvPr/>
+        </p:nvCxnSpPr>
+        <p:spPr>
+          <a:xfrm>
+            <a:off x="13975080" y="2123999"/>
+            <a:ext cx="0" cy="1830784"/>
+          </a:xfrm>
+          <a:prstGeom prst="line">
+            <a:avLst/>
+          </a:prstGeom>
+          <a:ln w="38100"/>
+        </p:spPr>
+        <p:style>
+          <a:lnRef idx="2">
+            <a:schemeClr val="dk1"/>
+          </a:lnRef>
+          <a:fillRef idx="0">
+            <a:schemeClr val="dk1"/>
+          </a:fillRef>
+          <a:effectRef idx="1">
+            <a:schemeClr val="dk1"/>
+          </a:effectRef>
+          <a:fontRef idx="minor">
+            <a:schemeClr val="tx1"/>
+          </a:fontRef>
+        </p:style>
+      </p:cxnSp>
+      <p:cxnSp>
+        <p:nvCxnSpPr>
+          <p:cNvPr id="36" name="Straight Connector 35">
+            <a:extLst>
+              <a:ext uri="{FF2B5EF4-FFF2-40B4-BE49-F238E27FC236}">
+                <a16:creationId xmlns:a16="http://schemas.microsoft.com/office/drawing/2014/main" id="{325DA83B-2EEE-50A9-8C6C-65083677B224}"/>
               </a:ext>
             </a:extLst>
           </p:cNvPr>
@@ -5623,8 +5350,454 @@
         </p:nvCxnSpPr>
         <p:spPr>
           <a:xfrm>
-            <a:off x="3828853" y="1217436"/>
-            <a:ext cx="298442" cy="0"/>
+            <a:off x="13741719" y="3984625"/>
+            <a:ext cx="485140" cy="0"/>
+          </a:xfrm>
+          <a:prstGeom prst="line">
+            <a:avLst/>
+          </a:prstGeom>
+          <a:ln w="76200"/>
+        </p:spPr>
+        <p:style>
+          <a:lnRef idx="2">
+            <a:schemeClr val="dk1"/>
+          </a:lnRef>
+          <a:fillRef idx="0">
+            <a:schemeClr val="dk1"/>
+          </a:fillRef>
+          <a:effectRef idx="1">
+            <a:schemeClr val="dk1"/>
+          </a:effectRef>
+          <a:fontRef idx="minor">
+            <a:schemeClr val="tx1"/>
+          </a:fontRef>
+        </p:style>
+      </p:cxnSp>
+      <p:sp>
+        <p:nvSpPr>
+          <p:cNvPr id="45" name="Oval 44">
+            <a:extLst>
+              <a:ext uri="{FF2B5EF4-FFF2-40B4-BE49-F238E27FC236}">
+                <a16:creationId xmlns:a16="http://schemas.microsoft.com/office/drawing/2014/main" id="{55886289-CCD6-FA46-402B-A943AFDE208F}"/>
+              </a:ext>
+            </a:extLst>
+          </p:cNvPr>
+          <p:cNvSpPr/>
+          <p:nvPr/>
+        </p:nvSpPr>
+        <p:spPr>
+          <a:xfrm>
+            <a:off x="12743398" y="1731990"/>
+            <a:ext cx="849007" cy="822111"/>
+          </a:xfrm>
+          <a:prstGeom prst="ellipse">
+            <a:avLst/>
+          </a:prstGeom>
+          <a:ln w="38100"/>
+        </p:spPr>
+        <p:style>
+          <a:lnRef idx="2">
+            <a:schemeClr val="dk1"/>
+          </a:lnRef>
+          <a:fillRef idx="1">
+            <a:schemeClr val="lt1"/>
+          </a:fillRef>
+          <a:effectRef idx="0">
+            <a:schemeClr val="dk1"/>
+          </a:effectRef>
+          <a:fontRef idx="minor">
+            <a:schemeClr val="dk1"/>
+          </a:fontRef>
+        </p:style>
+        <p:txBody>
+          <a:bodyPr rtlCol="0" anchor="ctr"/>
+          <a:lstStyle/>
+          <a:p>
+            <a:pPr algn="ctr"/>
+            <a:endParaRPr lang="de-DE"/>
+          </a:p>
+        </p:txBody>
+      </p:sp>
+      <p:sp>
+        <p:nvSpPr>
+          <p:cNvPr id="51" name="Freeform: Shape 50">
+            <a:extLst>
+              <a:ext uri="{FF2B5EF4-FFF2-40B4-BE49-F238E27FC236}">
+                <a16:creationId xmlns:a16="http://schemas.microsoft.com/office/drawing/2014/main" id="{E5C7C253-934E-86C8-088E-C5DEC114EA98}"/>
+              </a:ext>
+            </a:extLst>
+          </p:cNvPr>
+          <p:cNvSpPr/>
+          <p:nvPr/>
+        </p:nvSpPr>
+        <p:spPr>
+          <a:xfrm>
+            <a:off x="12825760" y="1954073"/>
+            <a:ext cx="660400" cy="377943"/>
+          </a:xfrm>
+          <a:custGeom>
+            <a:avLst/>
+            <a:gdLst>
+              <a:gd name="csX0" fmla="*/ 0 w 660400"/>
+              <a:gd name="csY0" fmla="*/ 352498 h 377943"/>
+              <a:gd name="csX1" fmla="*/ 200025 w 660400"/>
+              <a:gd name="csY1" fmla="*/ 73 h 377943"/>
+              <a:gd name="csX2" fmla="*/ 466725 w 660400"/>
+              <a:gd name="csY2" fmla="*/ 377898 h 377943"/>
+              <a:gd name="csX3" fmla="*/ 660400 w 660400"/>
+              <a:gd name="csY3" fmla="*/ 25473 h 377943"/>
+            </a:gdLst>
+            <a:ahLst/>
+            <a:cxnLst>
+              <a:cxn ang="0">
+                <a:pos x="csX0" y="csY0"/>
+              </a:cxn>
+              <a:cxn ang="0">
+                <a:pos x="csX1" y="csY1"/>
+              </a:cxn>
+              <a:cxn ang="0">
+                <a:pos x="csX2" y="csY2"/>
+              </a:cxn>
+              <a:cxn ang="0">
+                <a:pos x="csX3" y="csY3"/>
+              </a:cxn>
+            </a:cxnLst>
+            <a:rect l="l" t="t" r="r" b="b"/>
+            <a:pathLst>
+              <a:path w="660400" h="377943">
+                <a:moveTo>
+                  <a:pt x="0" y="352498"/>
+                </a:moveTo>
+                <a:cubicBezTo>
+                  <a:pt x="61119" y="174169"/>
+                  <a:pt x="122238" y="-4160"/>
+                  <a:pt x="200025" y="73"/>
+                </a:cubicBezTo>
+                <a:cubicBezTo>
+                  <a:pt x="277812" y="4306"/>
+                  <a:pt x="389996" y="373665"/>
+                  <a:pt x="466725" y="377898"/>
+                </a:cubicBezTo>
+                <a:cubicBezTo>
+                  <a:pt x="543454" y="382131"/>
+                  <a:pt x="608542" y="88444"/>
+                  <a:pt x="660400" y="25473"/>
+                </a:cubicBezTo>
+              </a:path>
+            </a:pathLst>
+          </a:custGeom>
+          <a:noFill/>
+        </p:spPr>
+        <p:style>
+          <a:lnRef idx="2">
+            <a:schemeClr val="accent1">
+              <a:shade val="15000"/>
+            </a:schemeClr>
+          </a:lnRef>
+          <a:fillRef idx="1">
+            <a:schemeClr val="accent1"/>
+          </a:fillRef>
+          <a:effectRef idx="0">
+            <a:schemeClr val="accent1"/>
+          </a:effectRef>
+          <a:fontRef idx="minor">
+            <a:schemeClr val="lt1"/>
+          </a:fontRef>
+        </p:style>
+        <p:txBody>
+          <a:bodyPr rtlCol="0" anchor="ctr"/>
+          <a:lstStyle/>
+          <a:p>
+            <a:pPr algn="ctr"/>
+            <a:endParaRPr lang="de-DE"/>
+          </a:p>
+        </p:txBody>
+      </p:sp>
+      <p:cxnSp>
+        <p:nvCxnSpPr>
+          <p:cNvPr id="67" name="Straight Connector 66">
+            <a:extLst>
+              <a:ext uri="{FF2B5EF4-FFF2-40B4-BE49-F238E27FC236}">
+                <a16:creationId xmlns:a16="http://schemas.microsoft.com/office/drawing/2014/main" id="{56F9D3F1-763C-BC12-46D8-33A611A6BF18}"/>
+              </a:ext>
+            </a:extLst>
+          </p:cNvPr>
+          <p:cNvCxnSpPr>
+            <a:cxnSpLocks/>
+          </p:cNvCxnSpPr>
+          <p:nvPr/>
+        </p:nvCxnSpPr>
+        <p:spPr>
+          <a:xfrm flipH="1">
+            <a:off x="11631128" y="3874389"/>
+            <a:ext cx="881285" cy="0"/>
+          </a:xfrm>
+          <a:prstGeom prst="line">
+            <a:avLst/>
+          </a:prstGeom>
+          <a:ln w="38100"/>
+        </p:spPr>
+        <p:style>
+          <a:lnRef idx="2">
+            <a:schemeClr val="dk1"/>
+          </a:lnRef>
+          <a:fillRef idx="0">
+            <a:schemeClr val="dk1"/>
+          </a:fillRef>
+          <a:effectRef idx="1">
+            <a:schemeClr val="dk1"/>
+          </a:effectRef>
+          <a:fontRef idx="minor">
+            <a:schemeClr val="tx1"/>
+          </a:fontRef>
+        </p:style>
+      </p:cxnSp>
+      <p:grpSp>
+        <p:nvGrpSpPr>
+          <p:cNvPr id="4" name="Group 3">
+            <a:extLst>
+              <a:ext uri="{FF2B5EF4-FFF2-40B4-BE49-F238E27FC236}">
+                <a16:creationId xmlns:a16="http://schemas.microsoft.com/office/drawing/2014/main" id="{A1404B32-4A7D-C083-7F52-E1F0FE36A7CC}"/>
+              </a:ext>
+            </a:extLst>
+          </p:cNvPr>
+          <p:cNvGrpSpPr/>
+          <p:nvPr/>
+        </p:nvGrpSpPr>
+        <p:grpSpPr>
+          <a:xfrm>
+            <a:off x="12068405" y="2787140"/>
+            <a:ext cx="849917" cy="820253"/>
+            <a:chOff x="9507813" y="1175206"/>
+            <a:chExt cx="849917" cy="820253"/>
+          </a:xfrm>
+        </p:grpSpPr>
+        <p:sp>
+          <p:nvSpPr>
+            <p:cNvPr id="1044" name="Oval 1043">
+              <a:extLst>
+                <a:ext uri="{FF2B5EF4-FFF2-40B4-BE49-F238E27FC236}">
+                  <a16:creationId xmlns:a16="http://schemas.microsoft.com/office/drawing/2014/main" id="{3CC806F6-4699-36DF-60AA-EF3FFCFBDB52}"/>
+                </a:ext>
+              </a:extLst>
+            </p:cNvPr>
+            <p:cNvSpPr>
+              <a:spLocks/>
+            </p:cNvSpPr>
+            <p:nvPr/>
+          </p:nvSpPr>
+          <p:spPr>
+            <a:xfrm>
+              <a:off x="9507813" y="1175206"/>
+              <a:ext cx="849917" cy="820253"/>
+            </a:xfrm>
+            <a:prstGeom prst="ellipse">
+              <a:avLst/>
+            </a:prstGeom>
+            <a:ln w="38100"/>
+          </p:spPr>
+          <p:style>
+            <a:lnRef idx="2">
+              <a:schemeClr val="dk1"/>
+            </a:lnRef>
+            <a:fillRef idx="1">
+              <a:schemeClr val="lt1"/>
+            </a:fillRef>
+            <a:effectRef idx="0">
+              <a:schemeClr val="dk1"/>
+            </a:effectRef>
+            <a:fontRef idx="minor">
+              <a:schemeClr val="dk1"/>
+            </a:fontRef>
+          </p:style>
+          <p:txBody>
+            <a:bodyPr rtlCol="0" anchor="ctr"/>
+            <a:lstStyle/>
+            <a:p>
+              <a:pPr algn="ctr"/>
+              <a:r>
+                <a:rPr lang="en-GB" sz="1543"/>
+                <a:t>CH1</a:t>
+              </a:r>
+              <a:endParaRPr lang="de-DE" sz="1543"/>
+            </a:p>
+          </p:txBody>
+        </p:sp>
+        <p:cxnSp>
+          <p:nvCxnSpPr>
+            <p:cNvPr id="1045" name="Straight Connector 1044">
+              <a:extLst>
+                <a:ext uri="{FF2B5EF4-FFF2-40B4-BE49-F238E27FC236}">
+                  <a16:creationId xmlns:a16="http://schemas.microsoft.com/office/drawing/2014/main" id="{EC15636A-6E94-48F8-8E3B-808AA82F4C42}"/>
+                </a:ext>
+              </a:extLst>
+            </p:cNvPr>
+            <p:cNvCxnSpPr>
+              <a:cxnSpLocks/>
+            </p:cNvCxnSpPr>
+            <p:nvPr/>
+          </p:nvCxnSpPr>
+          <p:spPr>
+            <a:xfrm>
+              <a:off x="9775187" y="1360013"/>
+              <a:ext cx="298442" cy="0"/>
+            </a:xfrm>
+            <a:prstGeom prst="line">
+              <a:avLst/>
+            </a:prstGeom>
+            <a:ln w="38100"/>
+          </p:spPr>
+          <p:style>
+            <a:lnRef idx="2">
+              <a:schemeClr val="dk1"/>
+            </a:lnRef>
+            <a:fillRef idx="0">
+              <a:schemeClr val="dk1"/>
+            </a:fillRef>
+            <a:effectRef idx="1">
+              <a:schemeClr val="dk1"/>
+            </a:effectRef>
+            <a:fontRef idx="minor">
+              <a:schemeClr val="tx1"/>
+            </a:fontRef>
+          </p:style>
+        </p:cxnSp>
+        <p:cxnSp>
+          <p:nvCxnSpPr>
+            <p:cNvPr id="1046" name="Straight Connector 1045">
+              <a:extLst>
+                <a:ext uri="{FF2B5EF4-FFF2-40B4-BE49-F238E27FC236}">
+                  <a16:creationId xmlns:a16="http://schemas.microsoft.com/office/drawing/2014/main" id="{3C469AFA-6CEA-2782-5C88-BF1B7659A34A}"/>
+                </a:ext>
+              </a:extLst>
+            </p:cNvPr>
+            <p:cNvCxnSpPr>
+              <a:cxnSpLocks/>
+            </p:cNvCxnSpPr>
+            <p:nvPr/>
+          </p:nvCxnSpPr>
+          <p:spPr>
+            <a:xfrm>
+              <a:off x="9783550" y="1821101"/>
+              <a:ext cx="298442" cy="0"/>
+            </a:xfrm>
+            <a:prstGeom prst="line">
+              <a:avLst/>
+            </a:prstGeom>
+            <a:ln w="38100"/>
+          </p:spPr>
+          <p:style>
+            <a:lnRef idx="2">
+              <a:schemeClr val="dk1"/>
+            </a:lnRef>
+            <a:fillRef idx="0">
+              <a:schemeClr val="dk1"/>
+            </a:fillRef>
+            <a:effectRef idx="1">
+              <a:schemeClr val="dk1"/>
+            </a:effectRef>
+            <a:fontRef idx="minor">
+              <a:schemeClr val="tx1"/>
+            </a:fontRef>
+          </p:style>
+        </p:cxnSp>
+        <p:cxnSp>
+          <p:nvCxnSpPr>
+            <p:cNvPr id="1047" name="Straight Connector 1046">
+              <a:extLst>
+                <a:ext uri="{FF2B5EF4-FFF2-40B4-BE49-F238E27FC236}">
+                  <a16:creationId xmlns:a16="http://schemas.microsoft.com/office/drawing/2014/main" id="{605EA3C5-A812-174F-A8E4-48F232E8A1B3}"/>
+                </a:ext>
+              </a:extLst>
+            </p:cNvPr>
+            <p:cNvCxnSpPr>
+              <a:cxnSpLocks/>
+            </p:cNvCxnSpPr>
+            <p:nvPr/>
+          </p:nvCxnSpPr>
+          <p:spPr>
+            <a:xfrm>
+              <a:off x="9932771" y="1189512"/>
+              <a:ext cx="0" cy="170500"/>
+            </a:xfrm>
+            <a:prstGeom prst="line">
+              <a:avLst/>
+            </a:prstGeom>
+            <a:ln w="38100"/>
+          </p:spPr>
+          <p:style>
+            <a:lnRef idx="2">
+              <a:schemeClr val="dk1"/>
+            </a:lnRef>
+            <a:fillRef idx="0">
+              <a:schemeClr val="dk1"/>
+            </a:fillRef>
+            <a:effectRef idx="1">
+              <a:schemeClr val="dk1"/>
+            </a:effectRef>
+            <a:fontRef idx="minor">
+              <a:schemeClr val="tx1"/>
+            </a:fontRef>
+          </p:style>
+        </p:cxnSp>
+        <p:cxnSp>
+          <p:nvCxnSpPr>
+            <p:cNvPr id="1048" name="Straight Connector 1047">
+              <a:extLst>
+                <a:ext uri="{FF2B5EF4-FFF2-40B4-BE49-F238E27FC236}">
+                  <a16:creationId xmlns:a16="http://schemas.microsoft.com/office/drawing/2014/main" id="{91090FCB-A846-88D4-0267-399A6874AF78}"/>
+                </a:ext>
+              </a:extLst>
+            </p:cNvPr>
+            <p:cNvCxnSpPr>
+              <a:cxnSpLocks/>
+            </p:cNvCxnSpPr>
+            <p:nvPr/>
+          </p:nvCxnSpPr>
+          <p:spPr>
+            <a:xfrm>
+              <a:off x="9935057" y="1824958"/>
+              <a:ext cx="0" cy="170500"/>
+            </a:xfrm>
+            <a:prstGeom prst="line">
+              <a:avLst/>
+            </a:prstGeom>
+            <a:ln w="38100"/>
+          </p:spPr>
+          <p:style>
+            <a:lnRef idx="2">
+              <a:schemeClr val="dk1"/>
+            </a:lnRef>
+            <a:fillRef idx="0">
+              <a:schemeClr val="dk1"/>
+            </a:fillRef>
+            <a:effectRef idx="1">
+              <a:schemeClr val="dk1"/>
+            </a:effectRef>
+            <a:fontRef idx="minor">
+              <a:schemeClr val="tx1"/>
+            </a:fontRef>
+          </p:style>
+        </p:cxnSp>
+      </p:grpSp>
+      <p:cxnSp>
+        <p:nvCxnSpPr>
+          <p:cNvPr id="16" name="Straight Connector 15">
+            <a:extLst>
+              <a:ext uri="{FF2B5EF4-FFF2-40B4-BE49-F238E27FC236}">
+                <a16:creationId xmlns:a16="http://schemas.microsoft.com/office/drawing/2014/main" id="{C758EB92-6159-8016-730F-1DEF0487CEFE}"/>
+              </a:ext>
+            </a:extLst>
+          </p:cNvPr>
+          <p:cNvCxnSpPr>
+            <a:cxnSpLocks/>
+          </p:cNvCxnSpPr>
+          <p:nvPr/>
+        </p:nvCxnSpPr>
+        <p:spPr>
+          <a:xfrm flipV="1">
+            <a:off x="12489554" y="2143046"/>
+            <a:ext cx="0" cy="644094"/>
           </a:xfrm>
           <a:prstGeom prst="line">
             <a:avLst/>
@@ -5648,10 +5821,49 @@
       </p:cxnSp>
       <p:cxnSp>
         <p:nvCxnSpPr>
-          <p:cNvPr id="1046" name="Straight Connector 1045">
+          <p:cNvPr id="21" name="Straight Connector 20">
             <a:extLst>
               <a:ext uri="{FF2B5EF4-FFF2-40B4-BE49-F238E27FC236}">
-                <a16:creationId xmlns:a16="http://schemas.microsoft.com/office/drawing/2014/main" id="{3C469AFA-6CEA-2782-5C88-BF1B7659A34A}"/>
+                <a16:creationId xmlns:a16="http://schemas.microsoft.com/office/drawing/2014/main" id="{20DAB114-D73D-3075-073F-A21BEBFE7A4A}"/>
+              </a:ext>
+            </a:extLst>
+          </p:cNvPr>
+          <p:cNvCxnSpPr>
+            <a:stCxn id="1044" idx="4"/>
+          </p:cNvCxnSpPr>
+          <p:nvPr/>
+        </p:nvCxnSpPr>
+        <p:spPr>
+          <a:xfrm>
+            <a:off x="12493364" y="3607393"/>
+            <a:ext cx="2285" cy="134027"/>
+          </a:xfrm>
+          <a:prstGeom prst="line">
+            <a:avLst/>
+          </a:prstGeom>
+          <a:ln w="38100"/>
+        </p:spPr>
+        <p:style>
+          <a:lnRef idx="2">
+            <a:schemeClr val="dk1"/>
+          </a:lnRef>
+          <a:fillRef idx="0">
+            <a:schemeClr val="dk1"/>
+          </a:fillRef>
+          <a:effectRef idx="1">
+            <a:schemeClr val="dk1"/>
+          </a:effectRef>
+          <a:fontRef idx="minor">
+            <a:schemeClr val="tx1"/>
+          </a:fontRef>
+        </p:style>
+      </p:cxnSp>
+      <p:cxnSp>
+        <p:nvCxnSpPr>
+          <p:cNvPr id="23" name="Straight Connector 22">
+            <a:extLst>
+              <a:ext uri="{FF2B5EF4-FFF2-40B4-BE49-F238E27FC236}">
+                <a16:creationId xmlns:a16="http://schemas.microsoft.com/office/drawing/2014/main" id="{E87EC00E-D7AA-31C7-7C24-9DEC496E1165}"/>
               </a:ext>
             </a:extLst>
           </p:cNvPr>
@@ -5662,8 +5874,276 @@
         </p:nvCxnSpPr>
         <p:spPr>
           <a:xfrm>
-            <a:off x="3837216" y="1678524"/>
-            <a:ext cx="298442" cy="0"/>
+            <a:off x="12473392" y="3752850"/>
+            <a:ext cx="1510897" cy="0"/>
+          </a:xfrm>
+          <a:prstGeom prst="line">
+            <a:avLst/>
+          </a:prstGeom>
+          <a:ln w="38100"/>
+        </p:spPr>
+        <p:style>
+          <a:lnRef idx="2">
+            <a:schemeClr val="dk1"/>
+          </a:lnRef>
+          <a:fillRef idx="0">
+            <a:schemeClr val="dk1"/>
+          </a:fillRef>
+          <a:effectRef idx="1">
+            <a:schemeClr val="dk1"/>
+          </a:effectRef>
+          <a:fontRef idx="minor">
+            <a:schemeClr val="tx1"/>
+          </a:fontRef>
+        </p:style>
+      </p:cxnSp>
+      <p:grpSp>
+        <p:nvGrpSpPr>
+          <p:cNvPr id="54" name="Group 53">
+            <a:extLst>
+              <a:ext uri="{FF2B5EF4-FFF2-40B4-BE49-F238E27FC236}">
+                <a16:creationId xmlns:a16="http://schemas.microsoft.com/office/drawing/2014/main" id="{0D4D6312-FB04-3188-8E57-0E54C8CFD4F7}"/>
+              </a:ext>
+            </a:extLst>
+          </p:cNvPr>
+          <p:cNvGrpSpPr/>
+          <p:nvPr/>
+        </p:nvGrpSpPr>
+        <p:grpSpPr>
+          <a:xfrm>
+            <a:off x="12068405" y="4171622"/>
+            <a:ext cx="849917" cy="820253"/>
+            <a:chOff x="9507813" y="1175206"/>
+            <a:chExt cx="849917" cy="820253"/>
+          </a:xfrm>
+        </p:grpSpPr>
+        <p:sp>
+          <p:nvSpPr>
+            <p:cNvPr id="55" name="Oval 54">
+              <a:extLst>
+                <a:ext uri="{FF2B5EF4-FFF2-40B4-BE49-F238E27FC236}">
+                  <a16:creationId xmlns:a16="http://schemas.microsoft.com/office/drawing/2014/main" id="{D8BF7E61-80E9-8FD0-A7B2-DB9B4551AF70}"/>
+                </a:ext>
+              </a:extLst>
+            </p:cNvPr>
+            <p:cNvSpPr>
+              <a:spLocks/>
+            </p:cNvSpPr>
+            <p:nvPr/>
+          </p:nvSpPr>
+          <p:spPr>
+            <a:xfrm>
+              <a:off x="9507813" y="1175206"/>
+              <a:ext cx="849917" cy="820253"/>
+            </a:xfrm>
+            <a:prstGeom prst="ellipse">
+              <a:avLst/>
+            </a:prstGeom>
+            <a:ln w="38100"/>
+          </p:spPr>
+          <p:style>
+            <a:lnRef idx="2">
+              <a:schemeClr val="dk1"/>
+            </a:lnRef>
+            <a:fillRef idx="1">
+              <a:schemeClr val="lt1"/>
+            </a:fillRef>
+            <a:effectRef idx="0">
+              <a:schemeClr val="dk1"/>
+            </a:effectRef>
+            <a:fontRef idx="minor">
+              <a:schemeClr val="dk1"/>
+            </a:fontRef>
+          </p:style>
+          <p:txBody>
+            <a:bodyPr rtlCol="0" anchor="ctr"/>
+            <a:lstStyle/>
+            <a:p>
+              <a:pPr algn="ctr"/>
+              <a:r>
+                <a:rPr lang="en-GB" sz="1543"/>
+                <a:t>CH2</a:t>
+              </a:r>
+              <a:endParaRPr lang="de-DE" sz="1543"/>
+            </a:p>
+          </p:txBody>
+        </p:sp>
+        <p:cxnSp>
+          <p:nvCxnSpPr>
+            <p:cNvPr id="56" name="Straight Connector 55">
+              <a:extLst>
+                <a:ext uri="{FF2B5EF4-FFF2-40B4-BE49-F238E27FC236}">
+                  <a16:creationId xmlns:a16="http://schemas.microsoft.com/office/drawing/2014/main" id="{185AE464-3B00-48AA-7DAA-BB8485EBB68C}"/>
+                </a:ext>
+              </a:extLst>
+            </p:cNvPr>
+            <p:cNvCxnSpPr>
+              <a:cxnSpLocks/>
+            </p:cNvCxnSpPr>
+            <p:nvPr/>
+          </p:nvCxnSpPr>
+          <p:spPr>
+            <a:xfrm>
+              <a:off x="9775187" y="1360013"/>
+              <a:ext cx="298442" cy="0"/>
+            </a:xfrm>
+            <a:prstGeom prst="line">
+              <a:avLst/>
+            </a:prstGeom>
+            <a:ln w="38100"/>
+          </p:spPr>
+          <p:style>
+            <a:lnRef idx="2">
+              <a:schemeClr val="dk1"/>
+            </a:lnRef>
+            <a:fillRef idx="0">
+              <a:schemeClr val="dk1"/>
+            </a:fillRef>
+            <a:effectRef idx="1">
+              <a:schemeClr val="dk1"/>
+            </a:effectRef>
+            <a:fontRef idx="minor">
+              <a:schemeClr val="tx1"/>
+            </a:fontRef>
+          </p:style>
+        </p:cxnSp>
+        <p:cxnSp>
+          <p:nvCxnSpPr>
+            <p:cNvPr id="57" name="Straight Connector 56">
+              <a:extLst>
+                <a:ext uri="{FF2B5EF4-FFF2-40B4-BE49-F238E27FC236}">
+                  <a16:creationId xmlns:a16="http://schemas.microsoft.com/office/drawing/2014/main" id="{E7EBB3E9-2CB7-F04F-F4B3-1BF9AA42FA58}"/>
+                </a:ext>
+              </a:extLst>
+            </p:cNvPr>
+            <p:cNvCxnSpPr>
+              <a:cxnSpLocks/>
+            </p:cNvCxnSpPr>
+            <p:nvPr/>
+          </p:nvCxnSpPr>
+          <p:spPr>
+            <a:xfrm>
+              <a:off x="9783550" y="1821101"/>
+              <a:ext cx="298442" cy="0"/>
+            </a:xfrm>
+            <a:prstGeom prst="line">
+              <a:avLst/>
+            </a:prstGeom>
+            <a:ln w="38100"/>
+          </p:spPr>
+          <p:style>
+            <a:lnRef idx="2">
+              <a:schemeClr val="dk1"/>
+            </a:lnRef>
+            <a:fillRef idx="0">
+              <a:schemeClr val="dk1"/>
+            </a:fillRef>
+            <a:effectRef idx="1">
+              <a:schemeClr val="dk1"/>
+            </a:effectRef>
+            <a:fontRef idx="minor">
+              <a:schemeClr val="tx1"/>
+            </a:fontRef>
+          </p:style>
+        </p:cxnSp>
+        <p:cxnSp>
+          <p:nvCxnSpPr>
+            <p:cNvPr id="58" name="Straight Connector 57">
+              <a:extLst>
+                <a:ext uri="{FF2B5EF4-FFF2-40B4-BE49-F238E27FC236}">
+                  <a16:creationId xmlns:a16="http://schemas.microsoft.com/office/drawing/2014/main" id="{F47011C6-F11E-5BC6-0379-0923050844C4}"/>
+                </a:ext>
+              </a:extLst>
+            </p:cNvPr>
+            <p:cNvCxnSpPr>
+              <a:cxnSpLocks/>
+            </p:cNvCxnSpPr>
+            <p:nvPr/>
+          </p:nvCxnSpPr>
+          <p:spPr>
+            <a:xfrm>
+              <a:off x="9932771" y="1189512"/>
+              <a:ext cx="0" cy="170500"/>
+            </a:xfrm>
+            <a:prstGeom prst="line">
+              <a:avLst/>
+            </a:prstGeom>
+            <a:ln w="38100"/>
+          </p:spPr>
+          <p:style>
+            <a:lnRef idx="2">
+              <a:schemeClr val="dk1"/>
+            </a:lnRef>
+            <a:fillRef idx="0">
+              <a:schemeClr val="dk1"/>
+            </a:fillRef>
+            <a:effectRef idx="1">
+              <a:schemeClr val="dk1"/>
+            </a:effectRef>
+            <a:fontRef idx="minor">
+              <a:schemeClr val="tx1"/>
+            </a:fontRef>
+          </p:style>
+        </p:cxnSp>
+        <p:cxnSp>
+          <p:nvCxnSpPr>
+            <p:cNvPr id="59" name="Straight Connector 58">
+              <a:extLst>
+                <a:ext uri="{FF2B5EF4-FFF2-40B4-BE49-F238E27FC236}">
+                  <a16:creationId xmlns:a16="http://schemas.microsoft.com/office/drawing/2014/main" id="{3A2D5D01-08AA-078D-7754-634CDB324F0A}"/>
+                </a:ext>
+              </a:extLst>
+            </p:cNvPr>
+            <p:cNvCxnSpPr>
+              <a:cxnSpLocks/>
+            </p:cNvCxnSpPr>
+            <p:nvPr/>
+          </p:nvCxnSpPr>
+          <p:spPr>
+            <a:xfrm>
+              <a:off x="9935057" y="1824958"/>
+              <a:ext cx="0" cy="170500"/>
+            </a:xfrm>
+            <a:prstGeom prst="line">
+              <a:avLst/>
+            </a:prstGeom>
+            <a:ln w="38100"/>
+          </p:spPr>
+          <p:style>
+            <a:lnRef idx="2">
+              <a:schemeClr val="dk1"/>
+            </a:lnRef>
+            <a:fillRef idx="0">
+              <a:schemeClr val="dk1"/>
+            </a:fillRef>
+            <a:effectRef idx="1">
+              <a:schemeClr val="dk1"/>
+            </a:effectRef>
+            <a:fontRef idx="minor">
+              <a:schemeClr val="tx1"/>
+            </a:fontRef>
+          </p:style>
+        </p:cxnSp>
+      </p:grpSp>
+      <p:cxnSp>
+        <p:nvCxnSpPr>
+          <p:cNvPr id="64" name="Straight Connector 63">
+            <a:extLst>
+              <a:ext uri="{FF2B5EF4-FFF2-40B4-BE49-F238E27FC236}">
+                <a16:creationId xmlns:a16="http://schemas.microsoft.com/office/drawing/2014/main" id="{C00C91DB-4D77-BABD-C4EF-0DC5DD3EDE6F}"/>
+              </a:ext>
+            </a:extLst>
+          </p:cNvPr>
+          <p:cNvCxnSpPr>
+            <a:cxnSpLocks/>
+            <a:endCxn id="55" idx="0"/>
+          </p:cNvCxnSpPr>
+          <p:nvPr/>
+        </p:nvCxnSpPr>
+        <p:spPr>
+          <a:xfrm>
+            <a:off x="12493364" y="3878246"/>
+            <a:ext cx="0" cy="293376"/>
           </a:xfrm>
           <a:prstGeom prst="line">
             <a:avLst/>
@@ -5687,10 +6167,10 @@
       </p:cxnSp>
       <p:cxnSp>
         <p:nvCxnSpPr>
-          <p:cNvPr id="1047" name="Straight Connector 1046">
+          <p:cNvPr id="69" name="Straight Connector 68">
             <a:extLst>
               <a:ext uri="{FF2B5EF4-FFF2-40B4-BE49-F238E27FC236}">
-                <a16:creationId xmlns:a16="http://schemas.microsoft.com/office/drawing/2014/main" id="{605EA3C5-A812-174F-A8E4-48F232E8A1B3}"/>
+                <a16:creationId xmlns:a16="http://schemas.microsoft.com/office/drawing/2014/main" id="{04C1664A-0ED5-F7E9-0A2D-D51FF7AB687E}"/>
               </a:ext>
             </a:extLst>
           </p:cNvPr>
@@ -5701,209 +6181,13 @@
         </p:nvCxnSpPr>
         <p:spPr>
           <a:xfrm>
-            <a:off x="3986437" y="1046935"/>
-            <a:ext cx="0" cy="170500"/>
+            <a:off x="12493363" y="4985524"/>
+            <a:ext cx="0" cy="361176"/>
           </a:xfrm>
           <a:prstGeom prst="line">
             <a:avLst/>
           </a:prstGeom>
           <a:ln w="38100"/>
-        </p:spPr>
-        <p:style>
-          <a:lnRef idx="2">
-            <a:schemeClr val="dk1"/>
-          </a:lnRef>
-          <a:fillRef idx="0">
-            <a:schemeClr val="dk1"/>
-          </a:fillRef>
-          <a:effectRef idx="1">
-            <a:schemeClr val="dk1"/>
-          </a:effectRef>
-          <a:fontRef idx="minor">
-            <a:schemeClr val="tx1"/>
-          </a:fontRef>
-        </p:style>
-      </p:cxnSp>
-      <p:cxnSp>
-        <p:nvCxnSpPr>
-          <p:cNvPr id="1048" name="Straight Connector 1047">
-            <a:extLst>
-              <a:ext uri="{FF2B5EF4-FFF2-40B4-BE49-F238E27FC236}">
-                <a16:creationId xmlns:a16="http://schemas.microsoft.com/office/drawing/2014/main" id="{91090FCB-A846-88D4-0267-399A6874AF78}"/>
-              </a:ext>
-            </a:extLst>
-          </p:cNvPr>
-          <p:cNvCxnSpPr>
-            <a:cxnSpLocks/>
-          </p:cNvCxnSpPr>
-          <p:nvPr/>
-        </p:nvCxnSpPr>
-        <p:spPr>
-          <a:xfrm>
-            <a:off x="3988723" y="1682381"/>
-            <a:ext cx="0" cy="170500"/>
-          </a:xfrm>
-          <a:prstGeom prst="line">
-            <a:avLst/>
-          </a:prstGeom>
-          <a:ln w="38100"/>
-        </p:spPr>
-        <p:style>
-          <a:lnRef idx="2">
-            <a:schemeClr val="dk1"/>
-          </a:lnRef>
-          <a:fillRef idx="0">
-            <a:schemeClr val="dk1"/>
-          </a:fillRef>
-          <a:effectRef idx="1">
-            <a:schemeClr val="dk1"/>
-          </a:effectRef>
-          <a:fontRef idx="minor">
-            <a:schemeClr val="tx1"/>
-          </a:fontRef>
-        </p:style>
-      </p:cxnSp>
-      <p:cxnSp>
-        <p:nvCxnSpPr>
-          <p:cNvPr id="113" name="Straight Connector 112">
-            <a:extLst>
-              <a:ext uri="{FF2B5EF4-FFF2-40B4-BE49-F238E27FC236}">
-                <a16:creationId xmlns:a16="http://schemas.microsoft.com/office/drawing/2014/main" id="{A2F32426-AE03-6782-084A-D446379F076F}"/>
-              </a:ext>
-            </a:extLst>
-          </p:cNvPr>
-          <p:cNvCxnSpPr>
-            <a:cxnSpLocks/>
-          </p:cNvCxnSpPr>
-          <p:nvPr/>
-        </p:nvCxnSpPr>
-        <p:spPr>
-          <a:xfrm flipH="1">
-            <a:off x="6327775" y="1447087"/>
-            <a:ext cx="955665" cy="0"/>
-          </a:xfrm>
-          <a:prstGeom prst="line">
-            <a:avLst/>
-          </a:prstGeom>
-          <a:ln w="57150"/>
-        </p:spPr>
-        <p:style>
-          <a:lnRef idx="2">
-            <a:schemeClr val="dk1"/>
-          </a:lnRef>
-          <a:fillRef idx="0">
-            <a:schemeClr val="dk1"/>
-          </a:fillRef>
-          <a:effectRef idx="1">
-            <a:schemeClr val="dk1"/>
-          </a:effectRef>
-          <a:fontRef idx="minor">
-            <a:schemeClr val="tx1"/>
-          </a:fontRef>
-        </p:style>
-      </p:cxnSp>
-      <p:cxnSp>
-        <p:nvCxnSpPr>
-          <p:cNvPr id="1061" name="Straight Connector 1060">
-            <a:extLst>
-              <a:ext uri="{FF2B5EF4-FFF2-40B4-BE49-F238E27FC236}">
-                <a16:creationId xmlns:a16="http://schemas.microsoft.com/office/drawing/2014/main" id="{A992E1AF-7822-F30B-D55B-07A321DDCD4D}"/>
-              </a:ext>
-            </a:extLst>
-          </p:cNvPr>
-          <p:cNvCxnSpPr>
-            <a:cxnSpLocks/>
-            <a:stCxn id="1028" idx="1"/>
-            <a:endCxn id="1044" idx="6"/>
-          </p:cNvCxnSpPr>
-          <p:nvPr/>
-        </p:nvCxnSpPr>
-        <p:spPr>
-          <a:xfrm flipH="1" flipV="1">
-            <a:off x="4411396" y="1442756"/>
-            <a:ext cx="816199" cy="2279"/>
-          </a:xfrm>
-          <a:prstGeom prst="line">
-            <a:avLst/>
-          </a:prstGeom>
-          <a:ln w="57150"/>
-        </p:spPr>
-        <p:style>
-          <a:lnRef idx="2">
-            <a:schemeClr val="dk1"/>
-          </a:lnRef>
-          <a:fillRef idx="0">
-            <a:schemeClr val="dk1"/>
-          </a:fillRef>
-          <a:effectRef idx="1">
-            <a:schemeClr val="dk1"/>
-          </a:effectRef>
-          <a:fontRef idx="minor">
-            <a:schemeClr val="tx1"/>
-          </a:fontRef>
-        </p:style>
-      </p:cxnSp>
-      <p:cxnSp>
-        <p:nvCxnSpPr>
-          <p:cNvPr id="1086" name="Straight Connector 1085">
-            <a:extLst>
-              <a:ext uri="{FF2B5EF4-FFF2-40B4-BE49-F238E27FC236}">
-                <a16:creationId xmlns:a16="http://schemas.microsoft.com/office/drawing/2014/main" id="{9E313DE0-7A53-2698-E94D-8B341D219569}"/>
-              </a:ext>
-            </a:extLst>
-          </p:cNvPr>
-          <p:cNvCxnSpPr>
-            <a:cxnSpLocks/>
-            <a:stCxn id="1034" idx="0"/>
-          </p:cNvCxnSpPr>
-          <p:nvPr/>
-        </p:nvCxnSpPr>
-        <p:spPr>
-          <a:xfrm>
-            <a:off x="7803681" y="1453437"/>
-            <a:ext cx="159219" cy="0"/>
-          </a:xfrm>
-          <a:prstGeom prst="line">
-            <a:avLst/>
-          </a:prstGeom>
-          <a:ln w="57150"/>
-        </p:spPr>
-        <p:style>
-          <a:lnRef idx="2">
-            <a:schemeClr val="dk1"/>
-          </a:lnRef>
-          <a:fillRef idx="0">
-            <a:schemeClr val="dk1"/>
-          </a:fillRef>
-          <a:effectRef idx="1">
-            <a:schemeClr val="dk1"/>
-          </a:effectRef>
-          <a:fontRef idx="minor">
-            <a:schemeClr val="tx1"/>
-          </a:fontRef>
-        </p:style>
-      </p:cxnSp>
-      <p:cxnSp>
-        <p:nvCxnSpPr>
-          <p:cNvPr id="1092" name="Straight Connector 1091">
-            <a:extLst>
-              <a:ext uri="{FF2B5EF4-FFF2-40B4-BE49-F238E27FC236}">
-                <a16:creationId xmlns:a16="http://schemas.microsoft.com/office/drawing/2014/main" id="{47843B72-DAFA-5FF4-2D3E-CF462A08935D}"/>
-              </a:ext>
-            </a:extLst>
-          </p:cNvPr>
-          <p:cNvCxnSpPr/>
-          <p:nvPr/>
-        </p:nvCxnSpPr>
-        <p:spPr>
-          <a:xfrm flipV="1">
-            <a:off x="7940675" y="1430056"/>
-            <a:ext cx="0" cy="704148"/>
-          </a:xfrm>
-          <a:prstGeom prst="line">
-            <a:avLst/>
-          </a:prstGeom>
-          <a:ln w="57150"/>
         </p:spPr>
         <p:style>
           <a:lnRef idx="2">
